--- a/decks/day2/module-3-eval-retrieval.pptx
+++ b/decks/day2/module-3-eval-retrieval.pptx
@@ -4564,7 +4564,7 @@
                 <a:ea typeface="Calibri" pitchFamily="34" charset="-122"/>
                 <a:cs typeface="Calibri" pitchFamily="34" charset="-120"/>
               </a:rPr>
-              <a:t>Attendees who skip this step do one of two things:</a:t>
+              <a:t>If you skip this step you'll do one of two things:</a:t>
             </a:r>
             <a:endParaRPr lang="en-US" sz="1400" dirty="0"/>
           </a:p>
@@ -5570,7 +5570,7 @@
                 <a:ea typeface="Calibri" pitchFamily="34" charset="-122"/>
                 <a:cs typeface="Calibri" pitchFamily="34" charset="-120"/>
               </a:rPr>
-              <a:t>Attendees do a small dose of each in today's lab</a:t>
+              <a:t>You'll do a small dose of each in today's lab</a:t>
             </a:r>
             <a:endParaRPr lang="en-US" sz="1500" dirty="0"/>
           </a:p>

--- a/decks/day2/module-3-eval-retrieval.pptx
+++ b/decks/day2/module-3-eval-retrieval.pptx
@@ -519,7 +519,7 @@
               <a:t>• Shortest module of Day 2 — 25 min
 • Bridges the Knowledge modules (1–2) into the Actions modules (4–7)
 • Sets up the eval habit that runs through Day 3, Day 4 anchor, Day 5 production
-• Focus attendees on the two must-know evaluators: Retrieval + Groundedness
+• Focus attendees on where to start: Retrieval (process) + Groundedness (system) — both zero-setup
 • Don't over-teach — Day 4 is the anchor</a:t>
             </a:r>
             <a:endParaRPr lang="en-US" dirty="0"/>
@@ -4259,7 +4259,7 @@
                 <a:ea typeface="Calibri" pitchFamily="34" charset="-122"/>
                 <a:cs typeface="Calibri" pitchFamily="34" charset="-120"/>
               </a:rPr>
-              <a:t>Foundry evaluators: Retrieval + Groundedness are the two must-know starting points.</a:t>
+              <a:t>Foundry evaluators: start with Retrieval (process) + Groundedness (system) — both zero-setup.</a:t>
             </a:r>
             <a:endParaRPr lang="en-US" sz="1500" dirty="0"/>
           </a:p>
@@ -7342,7 +7342,7 @@
                 <a:ea typeface="Calibri" pitchFamily="34" charset="-122"/>
                 <a:cs typeface="Calibri" pitchFamily="34" charset="-120"/>
               </a:rPr>
-              <a:t>The two must-know evaluators</a:t>
+              <a:t>Where to start — Retrieval and Groundedness</a:t>
             </a:r>
             <a:endParaRPr lang="en-US" sz="2800" dirty="0"/>
           </a:p>
@@ -7381,7 +7381,7 @@
                 <a:ea typeface="Calibri" pitchFamily="34" charset="-122"/>
                 <a:cs typeface="Calibri" pitchFamily="34" charset="-120"/>
               </a:rPr>
-              <a:t>For today's lab and most real-world starting points:</a:t>
+              <a:t>Two zero-setup RAG evaluators — one process, one system. Neither needs ground truth.</a:t>
             </a:r>
             <a:endParaRPr lang="en-US" sz="1400" dirty="0"/>
           </a:p>

--- a/decks/day2/module-3-eval-retrieval.pptx
+++ b/decks/day2/module-3-eval-retrieval.pptx
@@ -20,9 +20,10 @@
     <p:sldId id="268" r:id="rId14"/>
     <p:sldId id="269" r:id="rId15"/>
     <p:sldId id="270" r:id="rId16"/>
+    <p:sldId id="271" r:id="rId17"/>
   </p:sldIdLst>
   <p:notesMasterIdLst>
-    <p:notesMasterId r:id="rId17"/>
+    <p:notesMasterId r:id="rId18"/>
   </p:notesMasterIdLst>
   <p:sldSz cx="9144000" cy="5143500"/>
   <p:notesSz cx="5143500" cy="9144000"/>
@@ -608,11 +609,11 @@
           <a:p>
             <a:r>
               <a:rPr lang="en-US" dirty="0"/>
-              <a:t>• Four fields matter — score, label, reason, metric
-• Most attendees only look at score — that's a mistake
-• The reason field is the debugging surface
-• Read the reasons on failures — that tells you what to fix
-• Threshold defaults to 3 — you can override per evaluator</a:t>
+              <a:t>• JSONL — one JSON object per line
+• Fields match the data_mapping from the previous slide
+• 10–15 items = the useful floor
+• Smaller than most attendees expect — don't overinvest before you know the eval works
+• The dataset is a living artifact — grow it as production surfaces failures</a:t>
             </a:r>
             <a:endParaRPr lang="en-US" dirty="0"/>
           </a:p>
@@ -700,11 +701,11 @@
           <a:p>
             <a:r>
               <a:rPr lang="en-US" dirty="0"/>
-              <a:t>• This slide's job: install the iteration habit
-• Same five-step loop as Day 1 Module 3 (prompt engineering)
-• The 'change one thing' rule is the discipline
-• Attendees will resist — 'but I have three ideas' — insist
-• The habit lands again Day 4 (multi-agent) and Day 5 (production)</a:t>
+              <a:t>• Four fields matter — score, label, reason, metric
+• Most attendees only look at score — that's a mistake
+• The reason field is the debugging surface
+• Read the reasons on failures — that tells you what to fix
+• Threshold defaults to 3 — you can override per evaluator</a:t>
             </a:r>
             <a:endParaRPr lang="en-US" dirty="0"/>
           </a:p>
@@ -792,11 +793,11 @@
           <a:p>
             <a:r>
               <a:rPr lang="en-US" dirty="0"/>
-              <a:t>• Honesty slide — don't oversell the judge
-• Judge bias is real — same eval, different model, different scores
-• Judge cost — pin the judge model to something cheap; don't use GPT-5.4 to judge GPT-5.4-mini output
-• Drift is a real problem — pin your judge version
-• The reason field cross-check is the antidote to blind trust in scores</a:t>
+              <a:t>• This slide's job: install the iteration habit
+• Same five-step loop as Day 1 Module 3 (prompt engineering)
+• The 'change one thing' rule is the discipline
+• Attendees will resist — 'but I have three ideas' — insist
+• The habit lands again Day 4 (multi-agent) and Day 5 (production)</a:t>
             </a:r>
             <a:endParaRPr lang="en-US" dirty="0"/>
           </a:p>
@@ -884,11 +885,11 @@
           <a:p>
             <a:r>
               <a:rPr lang="en-US" dirty="0"/>
-              <a:t>• Same pattern as Modules 1 and 2 — a full slide of traps
-• Six bullets, ~15 sec each
-• The 'ignoring reason' bullet is worth reinforcing
-• The 'judge = production' bullet is subtle — worth a beat
-• Attendees who nail these six traps will do 80% of eval right in production</a:t>
+              <a:t>• Honesty slide — don't oversell the judge
+• Judge bias is real — same eval, different model, different scores
+• Judge cost — pin the judge model to something cheap; don't use GPT-5.4 to judge GPT-5.4-mini output
+• Drift is a real problem — pin your judge version
+• The reason field cross-check is the antidote to blind trust in scores</a:t>
             </a:r>
             <a:endParaRPr lang="en-US" dirty="0"/>
           </a:p>
@@ -976,11 +977,11 @@
           <a:p>
             <a:r>
               <a:rPr lang="en-US" dirty="0"/>
-              <a:t>• Continuity slide — attendees see where eval reappears
-• Day 4 is the anchor — most eval depth lands there
-• Day 5 pushes into production eval (drift, red-teaming)
-• Capstone requires a golden set + eval score
-• The through-line: eval is a workshop-wide theme, not a Day 5 topic</a:t>
+              <a:t>• Same pattern as Modules 1 and 2 — a full slide of traps
+• Six bullets, ~15 sec each
+• The 'ignoring reason' bullet is worth reinforcing
+• The 'judge = production' bullet is subtle — worth a beat
+• Attendees who nail these six traps will do 80% of eval right in production</a:t>
             </a:r>
             <a:endParaRPr lang="en-US" dirty="0"/>
           </a:p>
@@ -1068,10 +1069,11 @@
           <a:p>
             <a:r>
               <a:rPr lang="en-US" dirty="0"/>
-              <a:t>• Quick recap — five bullets
-• Emphasize: Retrieval + Groundedness as the two starter evaluators
-• Bridge to Module 4 — 'we've covered Knowledge; now Actions'
-• Time check — Modules 1+2+3 combined = ~100 min in</a:t>
+              <a:t>• Continuity slide — attendees see where eval reappears
+• Day 4 is the anchor — most eval depth lands there
+• Day 5 pushes into production eval (drift, red-teaming)
+• Capstone requires a golden set + eval score
+• The through-line: eval is a workshop-wide theme, not a Day 5 topic</a:t>
             </a:r>
             <a:endParaRPr lang="en-US" dirty="0"/>
           </a:p>
@@ -1095,6 +1097,97 @@
             <a:fld id="{F7021451-1387-4CA6-816F-3879F97B5CBC}" type="slidenum">
               <a:rPr lang="en-US"/>
               <a:t>15</a:t>
+            </a:fld>
+            <a:endParaRPr lang="en-US"/>
+          </a:p>
+        </p:txBody>
+      </p:sp>
+    </p:spTree>
+    <p:extLst>
+      <p:ext uri="{BB962C8B-B14F-4D97-AF65-F5344CB8AC3E}">
+        <p14:creationId xmlns:p14="http://schemas.microsoft.com/office/powerpoint/2010/main" val="1024086991"/>
+      </p:ext>
+    </p:extLst>
+  </p:cSld>
+  <p:clrMapOvr>
+    <a:masterClrMapping/>
+  </p:clrMapOvr>
+</p:notes>
+</file>
+
+<file path=ppt/notesSlides/notesSlide16.xml><?xml version="1.0" encoding="utf-8"?>
+<p:notes xmlns:a="http://schemas.openxmlformats.org/drawingml/2006/main" xmlns:r="http://schemas.openxmlformats.org/officeDocument/2006/relationships" xmlns:p="http://schemas.openxmlformats.org/presentationml/2006/main">
+  <p:cSld>
+    <p:spTree>
+      <p:nvGrpSpPr>
+        <p:cNvPr id="1" name=""/>
+        <p:cNvGrpSpPr/>
+        <p:nvPr/>
+      </p:nvGrpSpPr>
+      <p:grpSpPr>
+        <a:xfrm>
+          <a:off x="0" y="0"/>
+          <a:ext cx="0" cy="0"/>
+          <a:chOff x="0" y="0"/>
+          <a:chExt cx="0" cy="0"/>
+        </a:xfrm>
+      </p:grpSpPr>
+      <p:sp>
+        <p:nvSpPr>
+          <p:cNvPr id="2" name="Slide Image Placeholder 1"/>
+          <p:cNvSpPr>
+            <a:spLocks noGrp="1" noRot="1" noChangeAspect="1"/>
+          </p:cNvSpPr>
+          <p:nvPr>
+            <p:ph type="sldImg"/>
+          </p:nvPr>
+        </p:nvSpPr>
+        <p:spPr/>
+      </p:sp>
+      <p:sp>
+        <p:nvSpPr>
+          <p:cNvPr id="3" name="Notes Placeholder 2"/>
+          <p:cNvSpPr>
+            <a:spLocks noGrp="1"/>
+          </p:cNvSpPr>
+          <p:nvPr>
+            <p:ph type="body" idx="1"/>
+          </p:nvPr>
+        </p:nvSpPr>
+        <p:spPr/>
+        <p:txBody>
+          <a:bodyPr/>
+          <a:lstStyle/>
+          <a:p>
+            <a:r>
+              <a:rPr lang="en-US" dirty="0"/>
+              <a:t>• Quick recap — five bullets
+• Emphasize: Retrieval + Groundedness as the two starter evaluators
+• Bridge to Module 4 — 'we've covered Knowledge; now Actions'
+• Time check — Modules 1+2+3 combined = ~100 min in</a:t>
+            </a:r>
+            <a:endParaRPr lang="en-US" dirty="0"/>
+          </a:p>
+        </p:txBody>
+      </p:sp>
+      <p:sp>
+        <p:nvSpPr>
+          <p:cNvPr id="4" name="Slide Number Placeholder 3"/>
+          <p:cNvSpPr>
+            <a:spLocks noGrp="1"/>
+          </p:cNvSpPr>
+          <p:nvPr>
+            <p:ph type="sldNum" sz="quarter" idx="10"/>
+          </p:nvPr>
+        </p:nvSpPr>
+        <p:spPr/>
+        <p:txBody>
+          <a:bodyPr/>
+          <a:lstStyle/>
+          <a:p>
+            <a:fld id="{F7021451-1387-4CA6-816F-3879F97B5CBC}" type="slidenum">
+              <a:rPr lang="en-US"/>
+              <a:t>16</a:t>
             </a:fld>
             <a:endParaRPr lang="en-US"/>
           </a:p>
@@ -1527,12 +1620,16 @@
           <a:p>
             <a:r>
               <a:rPr lang="en-US" dirty="0"/>
-              <a:t>• Precision vs. recall — attendees know these terms already
-• Groundedness = 'nothing extra'; Completeness = 'nothing missing'
-• You want high on both — but they trade off
-• High-groundedness low-completeness = safe but useless
-• Low-groundedness high-completeness = comprehensive but hallucinating
-• Response Completeness needs ground truth — earn the investment</a:t>
+              <a:t>• DEMO 3.1 · ~4 min
+• Two transcripts pre-staged in the demo folder: part_a_grounded_transcript.jsonl + part_a_baseline_transcript.jsonl
+• .env at demo folder: AZURE_OPENAI_ENDPOINT + EVALUATION_MODEL
+• Split terminal, both panes in the demo folder
+• Step 1 (~30s): head + jq the first row of each transcript; point at context_length ~27000 vs 0
+• Step 2 (~45s, left pane): 'uv run python retrieval_eval.py part_a_grounded_transcript.jsonl' → read scores aloud, slot into a Grounded / Baseline matrix
+• Step 3 (~30s, right pane): 'uv run python retrieval_eval.py part_a_baseline_transcript.jsonl' → refusal message appears instantly, non-zero exit; pause for the beat
+• Step 4 (~60s): reframe — eval isn't 'your agent is bad,' it's 'you have no retrieved context to evaluate.' Grounded numbers ARE real, baseline REFUSED to score
+• Fallback: dry-run screenshots (both terminal outputs, saved result.json)
+• Payoff line: 'Eval is a signal about your architecture, not just a scoring tool.'</a:t>
             </a:r>
             <a:endParaRPr lang="en-US" dirty="0"/>
           </a:p>
@@ -1620,12 +1717,12 @@
           <a:p>
             <a:r>
               <a:rPr lang="en-US" dirty="0"/>
-              <a:t>• This is the tuning evaluator — not for today's lab
-• Attendees will use it when they're serious about retrieval quality
-• Requires labeled data — someone graded 'this doc is a 4/5 for this query'
-• NDCG is the classic search-quality metric
-• Parameter sweep = run with vector/keyword/hybrid, top_k=5/10/20, chunk 500/1000, compare NDCG
-• Introduce the concept, don't require it in the lab</a:t>
+              <a:t>• Precision vs. recall — attendees know these terms already
+• Groundedness = 'nothing extra'; Completeness = 'nothing missing'
+• You want high on both — but they trade off
+• High-groundedness low-completeness = safe but useless
+• Low-groundedness high-completeness = comprehensive but hallucinating
+• Response Completeness needs ground truth — earn the investment</a:t>
             </a:r>
             <a:endParaRPr lang="en-US" dirty="0"/>
           </a:p>
@@ -1713,11 +1810,12 @@
           <a:p>
             <a:r>
               <a:rPr lang="en-US" dirty="0"/>
-              <a:t>• Show the shape — attendees will copy this into the lab
-• Every evaluator has: type, name, evaluator_name, initialization_parameters, data_mapping
-• The {{item.field}} syntax refers to fields on your JSONL test dataset (next slide)
-• deployment_name = the model that judges (usually a smaller one than production)
-• Attendees don't need to memorize the JSON — pattern-match it</a:t>
+              <a:t>• This is the tuning evaluator — not for today's lab
+• Attendees will use it when they're serious about retrieval quality
+• Requires labeled data — someone graded 'this doc is a 4/5 for this query'
+• NDCG is the classic search-quality metric
+• Parameter sweep = run with vector/keyword/hybrid, top_k=5/10/20, chunk 500/1000, compare NDCG
+• Introduce the concept, don't require it in the lab</a:t>
             </a:r>
             <a:endParaRPr lang="en-US" dirty="0"/>
           </a:p>
@@ -1805,11 +1903,11 @@
           <a:p>
             <a:r>
               <a:rPr lang="en-US" dirty="0"/>
-              <a:t>• JSONL — one JSON object per line
-• Fields match the data_mapping from the previous slide
-• 10–15 items = the useful floor
-• Smaller than most attendees expect — don't overinvest before you know the eval works
-• The dataset is a living artifact — grow it as production surfaces failures</a:t>
+              <a:t>• Show the shape — attendees will copy this into the lab
+• Every evaluator has: type, name, evaluator_name, initialization_parameters, data_mapping
+• The {{item.field}} syntax refers to fields on your JSONL test dataset (next slide)
+• deployment_name = the model that judges (usually a smaller one than production)
+• Attendees don't need to memorize the JSON — pattern-match it</a:t>
             </a:r>
             <a:endParaRPr lang="en-US" dirty="0"/>
           </a:p>
@@ -2462,7 +2560,7 @@
                 <a:ea typeface="Calibri" pitchFamily="34" charset="-122"/>
                 <a:cs typeface="Calibri" pitchFamily="34" charset="-120"/>
               </a:rPr>
-              <a:t>Reading the output</a:t>
+              <a:t>The test dataset — smaller than you think</a:t>
             </a:r>
             <a:endParaRPr lang="en-US" sz="2800" dirty="0"/>
           </a:p>
@@ -2470,14 +2568,53 @@
       </p:sp>
       <p:sp>
         <p:nvSpPr>
-          <p:cNvPr id="5" name="Shape 3"/>
+          <p:cNvPr id="5" name="Text 3"/>
           <p:cNvSpPr/>
           <p:nvPr/>
         </p:nvSpPr>
         <p:spPr>
           <a:xfrm>
-            <a:off x="365760" y="1097280"/>
-            <a:ext cx="8412480" cy="2468880"/>
+            <a:off x="365760" y="1051560"/>
+            <a:ext cx="8412480" cy="365760"/>
+          </a:xfrm>
+          <a:prstGeom prst="rect">
+            <a:avLst/>
+          </a:prstGeom>
+          <a:noFill/>
+          <a:ln/>
+        </p:spPr>
+        <p:txBody>
+          <a:bodyPr wrap="square" rtlCol="0" anchor="ctr"/>
+          <a:lstStyle/>
+          <a:p>
+            <a:pPr indent="0" marL="0">
+              <a:buNone/>
+            </a:pPr>
+            <a:r>
+              <a:rPr lang="en-US" sz="1400" dirty="0">
+                <a:solidFill>
+                  <a:srgbClr val="212121"/>
+                </a:solidFill>
+                <a:latin typeface="Calibri" pitchFamily="34" charset="0"/>
+                <a:ea typeface="Calibri" pitchFamily="34" charset="-122"/>
+                <a:cs typeface="Calibri" pitchFamily="34" charset="-120"/>
+              </a:rPr>
+              <a:t>A JSONL file, one line per test case:</a:t>
+            </a:r>
+            <a:endParaRPr lang="en-US" sz="1400" dirty="0"/>
+          </a:p>
+        </p:txBody>
+      </p:sp>
+      <p:sp>
+        <p:nvSpPr>
+          <p:cNvPr id="6" name="Shape 4"/>
+          <p:cNvSpPr/>
+          <p:nvPr/>
+        </p:nvSpPr>
+        <p:spPr>
+          <a:xfrm>
+            <a:off x="365760" y="1508760"/>
+            <a:ext cx="8412480" cy="2194560"/>
           </a:xfrm>
           <a:prstGeom prst="rect">
             <a:avLst/>
@@ -2495,14 +2632,14 @@
       </p:sp>
       <p:sp>
         <p:nvSpPr>
-          <p:cNvPr id="6" name="Text 4"/>
+          <p:cNvPr id="7" name="Text 5"/>
           <p:cNvSpPr/>
           <p:nvPr/>
         </p:nvSpPr>
         <p:spPr>
           <a:xfrm>
-            <a:off x="502920" y="1188720"/>
-            <a:ext cx="8138160" cy="2286000"/>
+            <a:off x="502920" y="1600200"/>
+            <a:ext cx="8138160" cy="2011680"/>
           </a:xfrm>
           <a:prstGeom prst="rect">
             <a:avLst/>
@@ -2518,7 +2655,7 @@
               <a:buNone/>
             </a:pPr>
             <a:r>
-              <a:rPr lang="en-US" sz="1200" dirty="0">
+              <a:rPr lang="en-US" sz="1100" dirty="0">
                 <a:solidFill>
                   <a:srgbClr val="212121"/>
                 </a:solidFill>
@@ -2526,16 +2663,16 @@
                 <a:ea typeface="Consolas" pitchFamily="34" charset="-122"/>
                 <a:cs typeface="Consolas" pitchFamily="34" charset="-120"/>
               </a:rPr>
-              <a:t>{</a:t>
-            </a:r>
-            <a:endParaRPr lang="en-US" sz="1200" dirty="0"/>
+              <a:t>{"query": "How do I set up a Prompt agent?",</a:t>
+            </a:r>
+            <a:endParaRPr lang="en-US" sz="1100" dirty="0"/>
           </a:p>
           <a:p>
             <a:pPr indent="0" marL="0">
               <a:buNone/>
             </a:pPr>
             <a:r>
-              <a:rPr lang="en-US" sz="1200" dirty="0">
+              <a:rPr lang="en-US" sz="1100" dirty="0">
                 <a:solidFill>
                   <a:srgbClr val="212121"/>
                 </a:solidFill>
@@ -2543,16 +2680,16 @@
                 <a:ea typeface="Consolas" pitchFamily="34" charset="-122"/>
                 <a:cs typeface="Consolas" pitchFamily="34" charset="-120"/>
               </a:rPr>
-              <a:t>  "type": "azure_ai_evaluator",</a:t>
-            </a:r>
-            <a:endParaRPr lang="en-US" sz="1200" dirty="0"/>
+              <a:t> "context": "A Prompt agent is authored in the Foundry portal or SDK...",</a:t>
+            </a:r>
+            <a:endParaRPr lang="en-US" sz="1100" dirty="0"/>
           </a:p>
           <a:p>
             <a:pPr indent="0" marL="0">
               <a:buNone/>
             </a:pPr>
             <a:r>
-              <a:rPr lang="en-US" sz="1200" dirty="0">
+              <a:rPr lang="en-US" sz="1100" dirty="0">
                 <a:solidFill>
                   <a:srgbClr val="212121"/>
                 </a:solidFill>
@@ -2560,16 +2697,16 @@
                 <a:ea typeface="Consolas" pitchFamily="34" charset="-122"/>
                 <a:cs typeface="Consolas" pitchFamily="34" charset="-120"/>
               </a:rPr>
-              <a:t>  "name": "Groundedness",</a:t>
-            </a:r>
-            <a:endParaRPr lang="en-US" sz="1200" dirty="0"/>
+              <a:t> "response": "You create a Prompt agent by..."}</a:t>
+            </a:r>
+            <a:endParaRPr lang="en-US" sz="1100" dirty="0"/>
           </a:p>
           <a:p>
             <a:pPr indent="0" marL="0">
               <a:buNone/>
             </a:pPr>
             <a:r>
-              <a:rPr lang="en-US" sz="1200" dirty="0">
+              <a:rPr lang="en-US" sz="1100" dirty="0">
                 <a:solidFill>
                   <a:srgbClr val="212121"/>
                 </a:solidFill>
@@ -2577,16 +2714,16 @@
                 <a:ea typeface="Consolas" pitchFamily="34" charset="-122"/>
                 <a:cs typeface="Consolas" pitchFamily="34" charset="-120"/>
               </a:rPr>
-              <a:t>  "metric": "groundedness",</a:t>
-            </a:r>
-            <a:endParaRPr lang="en-US" sz="1200" dirty="0"/>
+              <a:t>{"query": "What models does Foundry support?",</a:t>
+            </a:r>
+            <a:endParaRPr lang="en-US" sz="1100" dirty="0"/>
           </a:p>
           <a:p>
             <a:pPr indent="0" marL="0">
               <a:buNone/>
             </a:pPr>
             <a:r>
-              <a:rPr lang="en-US" sz="1200" dirty="0">
+              <a:rPr lang="en-US" sz="1100" dirty="0">
                 <a:solidFill>
                   <a:srgbClr val="212121"/>
                 </a:solidFill>
@@ -2594,16 +2731,16 @@
                 <a:ea typeface="Consolas" pitchFamily="34" charset="-122"/>
                 <a:cs typeface="Consolas" pitchFamily="34" charset="-120"/>
               </a:rPr>
-              <a:t>  "score": 4,</a:t>
-            </a:r>
-            <a:endParaRPr lang="en-US" sz="1200" dirty="0"/>
+              <a:t> "context": "Foundry hosts models from Azure OpenAI, Anthropic, Meta...",</a:t>
+            </a:r>
+            <a:endParaRPr lang="en-US" sz="1100" dirty="0"/>
           </a:p>
           <a:p>
             <a:pPr indent="0" marL="0">
               <a:buNone/>
             </a:pPr>
             <a:r>
-              <a:rPr lang="en-US" sz="1200" dirty="0">
+              <a:rPr lang="en-US" sz="1100" dirty="0">
                 <a:solidFill>
                   <a:srgbClr val="212121"/>
                 </a:solidFill>
@@ -2611,90 +2748,22 @@
                 <a:ea typeface="Consolas" pitchFamily="34" charset="-122"/>
                 <a:cs typeface="Consolas" pitchFamily="34" charset="-120"/>
               </a:rPr>
-              <a:t>  "label": "pass",</a:t>
-            </a:r>
-            <a:endParaRPr lang="en-US" sz="1200" dirty="0"/>
-          </a:p>
-          <a:p>
-            <a:pPr indent="0" marL="0">
-              <a:buNone/>
-            </a:pPr>
-            <a:r>
-              <a:rPr lang="en-US" sz="1200" dirty="0">
-                <a:solidFill>
-                  <a:srgbClr val="212121"/>
-                </a:solidFill>
-                <a:latin typeface="Consolas" pitchFamily="34" charset="0"/>
-                <a:ea typeface="Consolas" pitchFamily="34" charset="-122"/>
-                <a:cs typeface="Consolas" pitchFamily="34" charset="-120"/>
-              </a:rPr>
-              <a:t>  "reason": "The response is well-grounded without fabricating content.",</a:t>
-            </a:r>
-            <a:endParaRPr lang="en-US" sz="1200" dirty="0"/>
-          </a:p>
-          <a:p>
-            <a:pPr indent="0" marL="0">
-              <a:buNone/>
-            </a:pPr>
-            <a:r>
-              <a:rPr lang="en-US" sz="1200" dirty="0">
-                <a:solidFill>
-                  <a:srgbClr val="212121"/>
-                </a:solidFill>
-                <a:latin typeface="Consolas" pitchFamily="34" charset="0"/>
-                <a:ea typeface="Consolas" pitchFamily="34" charset="-122"/>
-                <a:cs typeface="Consolas" pitchFamily="34" charset="-120"/>
-              </a:rPr>
-              <a:t>  "threshold": 3,</a:t>
-            </a:r>
-            <a:endParaRPr lang="en-US" sz="1200" dirty="0"/>
-          </a:p>
-          <a:p>
-            <a:pPr indent="0" marL="0">
-              <a:buNone/>
-            </a:pPr>
-            <a:r>
-              <a:rPr lang="en-US" sz="1200" dirty="0">
-                <a:solidFill>
-                  <a:srgbClr val="212121"/>
-                </a:solidFill>
-                <a:latin typeface="Consolas" pitchFamily="34" charset="0"/>
-                <a:ea typeface="Consolas" pitchFamily="34" charset="-122"/>
-                <a:cs typeface="Consolas" pitchFamily="34" charset="-120"/>
-              </a:rPr>
-              <a:t>  "passed": true</a:t>
-            </a:r>
-            <a:endParaRPr lang="en-US" sz="1200" dirty="0"/>
-          </a:p>
-          <a:p>
-            <a:pPr indent="0" marL="0">
-              <a:buNone/>
-            </a:pPr>
-            <a:r>
-              <a:rPr lang="en-US" sz="1200" dirty="0">
-                <a:solidFill>
-                  <a:srgbClr val="212121"/>
-                </a:solidFill>
-                <a:latin typeface="Consolas" pitchFamily="34" charset="0"/>
-                <a:ea typeface="Consolas" pitchFamily="34" charset="-122"/>
-                <a:cs typeface="Consolas" pitchFamily="34" charset="-120"/>
-              </a:rPr>
-              <a:t>}</a:t>
-            </a:r>
-            <a:endParaRPr lang="en-US" sz="1200" dirty="0"/>
-          </a:p>
-        </p:txBody>
-      </p:sp>
-      <p:sp>
-        <p:nvSpPr>
-          <p:cNvPr id="7" name="Text 5"/>
+              <a:t> "response": "Foundry supports multiple models including..."}</a:t>
+            </a:r>
+            <a:endParaRPr lang="en-US" sz="1100" dirty="0"/>
+          </a:p>
+        </p:txBody>
+      </p:sp>
+      <p:sp>
+        <p:nvSpPr>
+          <p:cNvPr id="8" name="Text 6"/>
           <p:cNvSpPr/>
           <p:nvPr/>
         </p:nvSpPr>
         <p:spPr>
           <a:xfrm>
-            <a:off x="365760" y="3703320"/>
-            <a:ext cx="8412480" cy="1005840"/>
+            <a:off x="365760" y="3794760"/>
+            <a:ext cx="8412480" cy="914400"/>
           </a:xfrm>
           <a:prstGeom prst="rect">
             <a:avLst/>
@@ -2722,7 +2791,7 @@
                 <a:ea typeface="Calibri" pitchFamily="34" charset="-122"/>
                 <a:cs typeface="Calibri" pitchFamily="34" charset="-120"/>
               </a:rPr>
-              <a:t>score — 1–5 numeric (or true/false for Pro)</a:t>
+              <a:t>Start with 10–15 examples</a:t>
             </a:r>
             <a:endParaRPr lang="en-US" sz="1200" dirty="0"/>
           </a:p>
@@ -2743,7 +2812,7 @@
                 <a:ea typeface="Calibri" pitchFamily="34" charset="-122"/>
                 <a:cs typeface="Calibri" pitchFamily="34" charset="-120"/>
               </a:rPr>
-              <a:t>label / passed — pass or fail against the threshold</a:t>
+              <a:t>Enough signal to catch obvious regressions; small enough to actually maintain</a:t>
             </a:r>
             <a:endParaRPr lang="en-US" sz="1200" dirty="0"/>
           </a:p>
@@ -2764,67 +2833,7 @@
                 <a:ea typeface="Calibri" pitchFamily="34" charset="-122"/>
                 <a:cs typeface="Calibri" pitchFamily="34" charset="-120"/>
               </a:rPr>
-              <a:t>reason — the LLM judge's explanation (read this when things fail)</a:t>
-            </a:r>
-            <a:endParaRPr lang="en-US" sz="1200" dirty="0"/>
-          </a:p>
-          <a:p>
-            <a:pPr marL="342900" indent="-342900">
-              <a:spcAft>
-                <a:spcPts val="600"/>
-              </a:spcAft>
-              <a:buSzPct val="100000"/>
-              <a:buChar char="•"/>
-            </a:pPr>
-            <a:r>
-              <a:rPr lang="en-US" sz="1200" dirty="0">
-                <a:solidFill>
-                  <a:srgbClr val="212121"/>
-                </a:solidFill>
-                <a:latin typeface="Calibri" pitchFamily="34" charset="0"/>
-                <a:ea typeface="Calibri" pitchFamily="34" charset="-122"/>
-                <a:cs typeface="Calibri" pitchFamily="34" charset="-120"/>
-              </a:rPr>
-              <a:t>metric — which evaluator produced this row</a:t>
-            </a:r>
-            <a:endParaRPr lang="en-US" sz="1200" dirty="0"/>
-          </a:p>
-        </p:txBody>
-      </p:sp>
-      <p:sp>
-        <p:nvSpPr>
-          <p:cNvPr id="8" name="Text 6"/>
-          <p:cNvSpPr/>
-          <p:nvPr/>
-        </p:nvSpPr>
-        <p:spPr>
-          <a:xfrm>
-            <a:off x="365760" y="4754880"/>
-            <a:ext cx="8412480" cy="274320"/>
-          </a:xfrm>
-          <a:prstGeom prst="rect">
-            <a:avLst/>
-          </a:prstGeom>
-          <a:noFill/>
-          <a:ln/>
-        </p:spPr>
-        <p:txBody>
-          <a:bodyPr wrap="square" rtlCol="0" anchor="ctr"/>
-          <a:lstStyle/>
-          <a:p>
-            <a:pPr indent="0" marL="0">
-              <a:buNone/>
-            </a:pPr>
-            <a:r>
-              <a:rPr lang="en-US" sz="1200" b="1" i="1" dirty="0">
-                <a:solidFill>
-                  <a:srgbClr val="1E2761"/>
-                </a:solidFill>
-                <a:latin typeface="Calibri" pitchFamily="34" charset="0"/>
-                <a:ea typeface="Calibri" pitchFamily="34" charset="-122"/>
-                <a:cs typeface="Calibri" pitchFamily="34" charset="-120"/>
-              </a:rPr>
-              <a:t>The reason field is where debugging happens. Read it.</a:t>
+              <a:t>Add examples over time as you find failure modes</a:t>
             </a:r>
             <a:endParaRPr lang="en-US" sz="1200" dirty="0"/>
           </a:p>
@@ -2954,7 +2963,7 @@
                 <a:ea typeface="Calibri" pitchFamily="34" charset="-122"/>
                 <a:cs typeface="Calibri" pitchFamily="34" charset="-120"/>
               </a:rPr>
-              <a:t>The iteration loop</a:t>
+              <a:t>Reading the output</a:t>
             </a:r>
             <a:endParaRPr lang="en-US" sz="2800" dirty="0"/>
           </a:p>
@@ -2962,42 +2971,28 @@
       </p:sp>
       <p:sp>
         <p:nvSpPr>
-          <p:cNvPr id="5" name="Text 3"/>
+          <p:cNvPr id="5" name="Shape 3"/>
           <p:cNvSpPr/>
           <p:nvPr/>
         </p:nvSpPr>
         <p:spPr>
           <a:xfrm>
             <a:off x="365760" y="1097280"/>
-            <a:ext cx="8412480" cy="365760"/>
-          </a:xfrm>
-          <a:prstGeom prst="rect">
-            <a:avLst/>
-          </a:prstGeom>
-          <a:noFill/>
-          <a:ln/>
-        </p:spPr>
-        <p:txBody>
-          <a:bodyPr wrap="square" rtlCol="0" anchor="ctr"/>
-          <a:lstStyle/>
-          <a:p>
-            <a:pPr indent="0" marL="0">
-              <a:buNone/>
-            </a:pPr>
-            <a:r>
-              <a:rPr lang="en-US" sz="1400" i="1" dirty="0">
-                <a:solidFill>
-                  <a:srgbClr val="212121"/>
-                </a:solidFill>
-                <a:latin typeface="Calibri" pitchFamily="34" charset="0"/>
-                <a:ea typeface="Calibri" pitchFamily="34" charset="-122"/>
-                <a:cs typeface="Calibri" pitchFamily="34" charset="-120"/>
-              </a:rPr>
-              <a:t>Same shape as Day 1's prompt-engineering loop:</a:t>
-            </a:r>
-            <a:endParaRPr lang="en-US" sz="1400" dirty="0"/>
-          </a:p>
-        </p:txBody>
+            <a:ext cx="8412480" cy="2468880"/>
+          </a:xfrm>
+          <a:prstGeom prst="rect">
+            <a:avLst/>
+          </a:prstGeom>
+          <a:solidFill>
+            <a:srgbClr val="F3F4F6"/>
+          </a:solidFill>
+          <a:ln w="6350">
+            <a:solidFill>
+              <a:srgbClr val="D1D5DB"/>
+            </a:solidFill>
+            <a:prstDash val="solid"/>
+          </a:ln>
+        </p:spPr>
       </p:sp>
       <p:sp>
         <p:nvSpPr>
@@ -3007,8 +3002,200 @@
         </p:nvSpPr>
         <p:spPr>
           <a:xfrm>
-            <a:off x="365760" y="1417320"/>
-            <a:ext cx="8412480" cy="2377440"/>
+            <a:off x="502920" y="1188720"/>
+            <a:ext cx="8138160" cy="2286000"/>
+          </a:xfrm>
+          <a:prstGeom prst="rect">
+            <a:avLst/>
+          </a:prstGeom>
+          <a:noFill/>
+          <a:ln/>
+        </p:spPr>
+        <p:txBody>
+          <a:bodyPr wrap="square" lIns="0" tIns="0" rIns="0" bIns="0" rtlCol="0" anchor="t"/>
+          <a:lstStyle/>
+          <a:p>
+            <a:pPr indent="0" marL="0">
+              <a:buNone/>
+            </a:pPr>
+            <a:r>
+              <a:rPr lang="en-US" sz="1200" dirty="0">
+                <a:solidFill>
+                  <a:srgbClr val="212121"/>
+                </a:solidFill>
+                <a:latin typeface="Consolas" pitchFamily="34" charset="0"/>
+                <a:ea typeface="Consolas" pitchFamily="34" charset="-122"/>
+                <a:cs typeface="Consolas" pitchFamily="34" charset="-120"/>
+              </a:rPr>
+              <a:t>{</a:t>
+            </a:r>
+            <a:endParaRPr lang="en-US" sz="1200" dirty="0"/>
+          </a:p>
+          <a:p>
+            <a:pPr indent="0" marL="0">
+              <a:buNone/>
+            </a:pPr>
+            <a:r>
+              <a:rPr lang="en-US" sz="1200" dirty="0">
+                <a:solidFill>
+                  <a:srgbClr val="212121"/>
+                </a:solidFill>
+                <a:latin typeface="Consolas" pitchFamily="34" charset="0"/>
+                <a:ea typeface="Consolas" pitchFamily="34" charset="-122"/>
+                <a:cs typeface="Consolas" pitchFamily="34" charset="-120"/>
+              </a:rPr>
+              <a:t>  "type": "azure_ai_evaluator",</a:t>
+            </a:r>
+            <a:endParaRPr lang="en-US" sz="1200" dirty="0"/>
+          </a:p>
+          <a:p>
+            <a:pPr indent="0" marL="0">
+              <a:buNone/>
+            </a:pPr>
+            <a:r>
+              <a:rPr lang="en-US" sz="1200" dirty="0">
+                <a:solidFill>
+                  <a:srgbClr val="212121"/>
+                </a:solidFill>
+                <a:latin typeface="Consolas" pitchFamily="34" charset="0"/>
+                <a:ea typeface="Consolas" pitchFamily="34" charset="-122"/>
+                <a:cs typeface="Consolas" pitchFamily="34" charset="-120"/>
+              </a:rPr>
+              <a:t>  "name": "Groundedness",</a:t>
+            </a:r>
+            <a:endParaRPr lang="en-US" sz="1200" dirty="0"/>
+          </a:p>
+          <a:p>
+            <a:pPr indent="0" marL="0">
+              <a:buNone/>
+            </a:pPr>
+            <a:r>
+              <a:rPr lang="en-US" sz="1200" dirty="0">
+                <a:solidFill>
+                  <a:srgbClr val="212121"/>
+                </a:solidFill>
+                <a:latin typeface="Consolas" pitchFamily="34" charset="0"/>
+                <a:ea typeface="Consolas" pitchFamily="34" charset="-122"/>
+                <a:cs typeface="Consolas" pitchFamily="34" charset="-120"/>
+              </a:rPr>
+              <a:t>  "metric": "groundedness",</a:t>
+            </a:r>
+            <a:endParaRPr lang="en-US" sz="1200" dirty="0"/>
+          </a:p>
+          <a:p>
+            <a:pPr indent="0" marL="0">
+              <a:buNone/>
+            </a:pPr>
+            <a:r>
+              <a:rPr lang="en-US" sz="1200" dirty="0">
+                <a:solidFill>
+                  <a:srgbClr val="212121"/>
+                </a:solidFill>
+                <a:latin typeface="Consolas" pitchFamily="34" charset="0"/>
+                <a:ea typeface="Consolas" pitchFamily="34" charset="-122"/>
+                <a:cs typeface="Consolas" pitchFamily="34" charset="-120"/>
+              </a:rPr>
+              <a:t>  "score": 4,</a:t>
+            </a:r>
+            <a:endParaRPr lang="en-US" sz="1200" dirty="0"/>
+          </a:p>
+          <a:p>
+            <a:pPr indent="0" marL="0">
+              <a:buNone/>
+            </a:pPr>
+            <a:r>
+              <a:rPr lang="en-US" sz="1200" dirty="0">
+                <a:solidFill>
+                  <a:srgbClr val="212121"/>
+                </a:solidFill>
+                <a:latin typeface="Consolas" pitchFamily="34" charset="0"/>
+                <a:ea typeface="Consolas" pitchFamily="34" charset="-122"/>
+                <a:cs typeface="Consolas" pitchFamily="34" charset="-120"/>
+              </a:rPr>
+              <a:t>  "label": "pass",</a:t>
+            </a:r>
+            <a:endParaRPr lang="en-US" sz="1200" dirty="0"/>
+          </a:p>
+          <a:p>
+            <a:pPr indent="0" marL="0">
+              <a:buNone/>
+            </a:pPr>
+            <a:r>
+              <a:rPr lang="en-US" sz="1200" dirty="0">
+                <a:solidFill>
+                  <a:srgbClr val="212121"/>
+                </a:solidFill>
+                <a:latin typeface="Consolas" pitchFamily="34" charset="0"/>
+                <a:ea typeface="Consolas" pitchFamily="34" charset="-122"/>
+                <a:cs typeface="Consolas" pitchFamily="34" charset="-120"/>
+              </a:rPr>
+              <a:t>  "reason": "The response is well-grounded without fabricating content.",</a:t>
+            </a:r>
+            <a:endParaRPr lang="en-US" sz="1200" dirty="0"/>
+          </a:p>
+          <a:p>
+            <a:pPr indent="0" marL="0">
+              <a:buNone/>
+            </a:pPr>
+            <a:r>
+              <a:rPr lang="en-US" sz="1200" dirty="0">
+                <a:solidFill>
+                  <a:srgbClr val="212121"/>
+                </a:solidFill>
+                <a:latin typeface="Consolas" pitchFamily="34" charset="0"/>
+                <a:ea typeface="Consolas" pitchFamily="34" charset="-122"/>
+                <a:cs typeface="Consolas" pitchFamily="34" charset="-120"/>
+              </a:rPr>
+              <a:t>  "threshold": 3,</a:t>
+            </a:r>
+            <a:endParaRPr lang="en-US" sz="1200" dirty="0"/>
+          </a:p>
+          <a:p>
+            <a:pPr indent="0" marL="0">
+              <a:buNone/>
+            </a:pPr>
+            <a:r>
+              <a:rPr lang="en-US" sz="1200" dirty="0">
+                <a:solidFill>
+                  <a:srgbClr val="212121"/>
+                </a:solidFill>
+                <a:latin typeface="Consolas" pitchFamily="34" charset="0"/>
+                <a:ea typeface="Consolas" pitchFamily="34" charset="-122"/>
+                <a:cs typeface="Consolas" pitchFamily="34" charset="-120"/>
+              </a:rPr>
+              <a:t>  "passed": true</a:t>
+            </a:r>
+            <a:endParaRPr lang="en-US" sz="1200" dirty="0"/>
+          </a:p>
+          <a:p>
+            <a:pPr indent="0" marL="0">
+              <a:buNone/>
+            </a:pPr>
+            <a:r>
+              <a:rPr lang="en-US" sz="1200" dirty="0">
+                <a:solidFill>
+                  <a:srgbClr val="212121"/>
+                </a:solidFill>
+                <a:latin typeface="Consolas" pitchFamily="34" charset="0"/>
+                <a:ea typeface="Consolas" pitchFamily="34" charset="-122"/>
+                <a:cs typeface="Consolas" pitchFamily="34" charset="-120"/>
+              </a:rPr>
+              <a:t>}</a:t>
+            </a:r>
+            <a:endParaRPr lang="en-US" sz="1200" dirty="0"/>
+          </a:p>
+        </p:txBody>
+      </p:sp>
+      <p:sp>
+        <p:nvSpPr>
+          <p:cNvPr id="7" name="Text 5"/>
+          <p:cNvSpPr/>
+          <p:nvPr/>
+        </p:nvSpPr>
+        <p:spPr>
+          <a:xfrm>
+            <a:off x="365760" y="3703320"/>
+            <a:ext cx="8412480" cy="1005840"/>
           </a:xfrm>
           <a:prstGeom prst="rect">
             <a:avLst/>
@@ -3028,7 +3215,7 @@
               <a:buChar char="•"/>
             </a:pPr>
             <a:r>
-              <a:rPr lang="en-US" sz="1500" dirty="0">
+              <a:rPr lang="en-US" sz="1200" dirty="0">
                 <a:solidFill>
                   <a:srgbClr val="212121"/>
                 </a:solidFill>
@@ -3036,9 +3223,9 @@
                 <a:ea typeface="Calibri" pitchFamily="34" charset="-122"/>
                 <a:cs typeface="Calibri" pitchFamily="34" charset="-120"/>
               </a:rPr>
-              <a:t>Author an eval dataset (10–15 items)</a:t>
-            </a:r>
-            <a:endParaRPr lang="en-US" sz="1500" dirty="0"/>
+              <a:t>score — 1–5 numeric (or true/false for Pro)</a:t>
+            </a:r>
+            <a:endParaRPr lang="en-US" sz="1200" dirty="0"/>
           </a:p>
           <a:p>
             <a:pPr marL="342900" indent="-342900">
@@ -3049,7 +3236,7 @@
               <a:buChar char="•"/>
             </a:pPr>
             <a:r>
-              <a:rPr lang="en-US" sz="1500" dirty="0">
+              <a:rPr lang="en-US" sz="1200" dirty="0">
                 <a:solidFill>
                   <a:srgbClr val="212121"/>
                 </a:solidFill>
@@ -3057,9 +3244,9 @@
                 <a:ea typeface="Calibri" pitchFamily="34" charset="-122"/>
                 <a:cs typeface="Calibri" pitchFamily="34" charset="-120"/>
               </a:rPr>
-              <a:t>Run Retrieval + Groundedness against your current pipeline</a:t>
-            </a:r>
-            <a:endParaRPr lang="en-US" sz="1500" dirty="0"/>
+              <a:t>label / passed — pass or fail against the threshold</a:t>
+            </a:r>
+            <a:endParaRPr lang="en-US" sz="1200" dirty="0"/>
           </a:p>
           <a:p>
             <a:pPr marL="342900" indent="-342900">
@@ -3070,7 +3257,7 @@
               <a:buChar char="•"/>
             </a:pPr>
             <a:r>
-              <a:rPr lang="en-US" sz="1500" dirty="0">
+              <a:rPr lang="en-US" sz="1200" dirty="0">
                 <a:solidFill>
                   <a:srgbClr val="212121"/>
                 </a:solidFill>
@@ -3078,9 +3265,9 @@
                 <a:ea typeface="Calibri" pitchFamily="34" charset="-122"/>
                 <a:cs typeface="Calibri" pitchFamily="34" charset="-120"/>
               </a:rPr>
-              <a:t>Read the failures — retrieval bug or generation bug?</a:t>
-            </a:r>
-            <a:endParaRPr lang="en-US" sz="1500" dirty="0"/>
+              <a:t>reason — the LLM judge's explanation (read this when things fail)</a:t>
+            </a:r>
+            <a:endParaRPr lang="en-US" sz="1200" dirty="0"/>
           </a:p>
           <a:p>
             <a:pPr marL="342900" indent="-342900">
@@ -3091,7 +3278,7 @@
               <a:buChar char="•"/>
             </a:pPr>
             <a:r>
-              <a:rPr lang="en-US" sz="1500" dirty="0">
+              <a:rPr lang="en-US" sz="1200" dirty="0">
                 <a:solidFill>
                   <a:srgbClr val="212121"/>
                 </a:solidFill>
@@ -3099,69 +3286,9 @@
                 <a:ea typeface="Calibri" pitchFamily="34" charset="-122"/>
                 <a:cs typeface="Calibri" pitchFamily="34" charset="-120"/>
               </a:rPr>
-              <a:t>Change one thing (chunk size, top_k, prompt, model)</a:t>
-            </a:r>
-            <a:endParaRPr lang="en-US" sz="1500" dirty="0"/>
-          </a:p>
-          <a:p>
-            <a:pPr marL="342900" indent="-342900">
-              <a:spcAft>
-                <a:spcPts val="600"/>
-              </a:spcAft>
-              <a:buSzPct val="100000"/>
-              <a:buChar char="•"/>
-            </a:pPr>
-            <a:r>
-              <a:rPr lang="en-US" sz="1500" dirty="0">
-                <a:solidFill>
-                  <a:srgbClr val="212121"/>
-                </a:solidFill>
-                <a:latin typeface="Calibri" pitchFamily="34" charset="0"/>
-                <a:ea typeface="Calibri" pitchFamily="34" charset="-122"/>
-                <a:cs typeface="Calibri" pitchFamily="34" charset="-120"/>
-              </a:rPr>
-              <a:t>Rerun. Compare scores.</a:t>
-            </a:r>
-            <a:endParaRPr lang="en-US" sz="1500" dirty="0"/>
-          </a:p>
-        </p:txBody>
-      </p:sp>
-      <p:sp>
-        <p:nvSpPr>
-          <p:cNvPr id="7" name="Text 5"/>
-          <p:cNvSpPr/>
-          <p:nvPr/>
-        </p:nvSpPr>
-        <p:spPr>
-          <a:xfrm>
-            <a:off x="365760" y="3886200"/>
-            <a:ext cx="8412480" cy="365760"/>
-          </a:xfrm>
-          <a:prstGeom prst="rect">
-            <a:avLst/>
-          </a:prstGeom>
-          <a:noFill/>
-          <a:ln/>
-        </p:spPr>
-        <p:txBody>
-          <a:bodyPr wrap="square" rtlCol="0" anchor="ctr"/>
-          <a:lstStyle/>
-          <a:p>
-            <a:pPr indent="0" marL="0">
-              <a:buNone/>
-            </a:pPr>
-            <a:r>
-              <a:rPr lang="en-US" sz="1300" b="1" i="1" dirty="0">
-                <a:solidFill>
-                  <a:srgbClr val="1E2761"/>
-                </a:solidFill>
-                <a:latin typeface="Calibri" pitchFamily="34" charset="0"/>
-                <a:ea typeface="Calibri" pitchFamily="34" charset="-122"/>
-                <a:cs typeface="Calibri" pitchFamily="34" charset="-120"/>
-              </a:rPr>
-              <a:t>Change one thing at a time. Three changes at once = you learned nothing about what worked.</a:t>
-            </a:r>
-            <a:endParaRPr lang="en-US" sz="1300" dirty="0"/>
+              <a:t>metric — which evaluator produced this row</a:t>
+            </a:r>
+            <a:endParaRPr lang="en-US" sz="1200" dirty="0"/>
           </a:p>
         </p:txBody>
       </p:sp>
@@ -3173,8 +3300,8 @@
         </p:nvSpPr>
         <p:spPr>
           <a:xfrm>
-            <a:off x="365760" y="4343400"/>
-            <a:ext cx="8412480" cy="365760"/>
+            <a:off x="365760" y="4754880"/>
+            <a:ext cx="8412480" cy="274320"/>
           </a:xfrm>
           <a:prstGeom prst="rect">
             <a:avLst/>
@@ -3190,15 +3317,15 @@
               <a:buNone/>
             </a:pPr>
             <a:r>
-              <a:rPr lang="en-US" sz="1200" i="1" dirty="0">
-                <a:solidFill>
-                  <a:srgbClr val="6B7280"/>
-                </a:solidFill>
-                <a:latin typeface="Calibri" pitchFamily="34" charset="0"/>
-                <a:ea typeface="Calibri" pitchFamily="34" charset="-122"/>
-                <a:cs typeface="Calibri" pitchFamily="34" charset="-120"/>
-              </a:rPr>
-              <a:t>Same discipline shows up Day 4 for multi-agent workflow eval.</a:t>
+              <a:rPr lang="en-US" sz="1200" b="1" i="1" dirty="0">
+                <a:solidFill>
+                  <a:srgbClr val="1E2761"/>
+                </a:solidFill>
+                <a:latin typeface="Calibri" pitchFamily="34" charset="0"/>
+                <a:ea typeface="Calibri" pitchFamily="34" charset="-122"/>
+                <a:cs typeface="Calibri" pitchFamily="34" charset="-120"/>
+              </a:rPr>
+              <a:t>The reason field is where debugging happens. Read it.</a:t>
             </a:r>
             <a:endParaRPr lang="en-US" sz="1200" dirty="0"/>
           </a:p>
@@ -3328,7 +3455,7 @@
                 <a:ea typeface="Calibri" pitchFamily="34" charset="-122"/>
                 <a:cs typeface="Calibri" pitchFamily="34" charset="-120"/>
               </a:rPr>
-              <a:t>LLM-as-judge caveats</a:t>
+              <a:t>The iteration loop</a:t>
             </a:r>
             <a:endParaRPr lang="en-US" sz="2800" dirty="0"/>
           </a:p>
@@ -3359,7 +3486,7 @@
               <a:buNone/>
             </a:pPr>
             <a:r>
-              <a:rPr lang="en-US" sz="1400" dirty="0">
+              <a:rPr lang="en-US" sz="1400" i="1" dirty="0">
                 <a:solidFill>
                   <a:srgbClr val="212121"/>
                 </a:solidFill>
@@ -3367,7 +3494,7 @@
                 <a:ea typeface="Calibri" pitchFamily="34" charset="-122"/>
                 <a:cs typeface="Calibri" pitchFamily="34" charset="-120"/>
               </a:rPr>
-              <a:t>You're using an LLM to judge an LLM. Some caveats:</a:t>
+              <a:t>Same shape as Day 1's prompt-engineering loop:</a:t>
             </a:r>
             <a:endParaRPr lang="en-US" sz="1400" dirty="0"/>
           </a:p>
@@ -3382,7 +3509,7 @@
         <p:spPr>
           <a:xfrm>
             <a:off x="365760" y="1417320"/>
-            <a:ext cx="8412480" cy="2651760"/>
+            <a:ext cx="8412480" cy="2377440"/>
           </a:xfrm>
           <a:prstGeom prst="rect">
             <a:avLst/>
@@ -3402,7 +3529,7 @@
               <a:buChar char="•"/>
             </a:pPr>
             <a:r>
-              <a:rPr lang="en-US" sz="1200" dirty="0">
+              <a:rPr lang="en-US" sz="1500" dirty="0">
                 <a:solidFill>
                   <a:srgbClr val="212121"/>
                 </a:solidFill>
@@ -3410,9 +3537,9 @@
                 <a:ea typeface="Calibri" pitchFamily="34" charset="-122"/>
                 <a:cs typeface="Calibri" pitchFamily="34" charset="-120"/>
               </a:rPr>
-              <a:t>Judge bias — the judge model has preferences. Same prompt, different judges = different scores.</a:t>
-            </a:r>
-            <a:endParaRPr lang="en-US" sz="1200" dirty="0"/>
+              <a:t>Author an eval dataset (10–15 items)</a:t>
+            </a:r>
+            <a:endParaRPr lang="en-US" sz="1500" dirty="0"/>
           </a:p>
           <a:p>
             <a:pPr marL="342900" indent="-342900">
@@ -3423,7 +3550,7 @@
               <a:buChar char="•"/>
             </a:pPr>
             <a:r>
-              <a:rPr lang="en-US" sz="1200" dirty="0">
+              <a:rPr lang="en-US" sz="1500" dirty="0">
                 <a:solidFill>
                   <a:srgbClr val="212121"/>
                 </a:solidFill>
@@ -3431,9 +3558,9 @@
                 <a:ea typeface="Calibri" pitchFamily="34" charset="-122"/>
                 <a:cs typeface="Calibri" pitchFamily="34" charset="-120"/>
               </a:rPr>
-              <a:t>Judge cost — every eval item is an extra LLM call. Budget accordingly.</a:t>
-            </a:r>
-            <a:endParaRPr lang="en-US" sz="1200" dirty="0"/>
+              <a:t>Run Retrieval + Groundedness against your current pipeline</a:t>
+            </a:r>
+            <a:endParaRPr lang="en-US" sz="1500" dirty="0"/>
           </a:p>
           <a:p>
             <a:pPr marL="342900" indent="-342900">
@@ -3444,7 +3571,7 @@
               <a:buChar char="•"/>
             </a:pPr>
             <a:r>
-              <a:rPr lang="en-US" sz="1200" dirty="0">
+              <a:rPr lang="en-US" sz="1500" dirty="0">
                 <a:solidFill>
                   <a:srgbClr val="212121"/>
                 </a:solidFill>
@@ -3452,9 +3579,9 @@
                 <a:ea typeface="Calibri" pitchFamily="34" charset="-122"/>
                 <a:cs typeface="Calibri" pitchFamily="34" charset="-120"/>
               </a:rPr>
-              <a:t>Judge drift — model updates can shift baseline scores. Version-pin your judge.</a:t>
-            </a:r>
-            <a:endParaRPr lang="en-US" sz="1200" dirty="0"/>
+              <a:t>Read the failures — retrieval bug or generation bug?</a:t>
+            </a:r>
+            <a:endParaRPr lang="en-US" sz="1500" dirty="0"/>
           </a:p>
           <a:p>
             <a:pPr marL="342900" indent="-342900">
@@ -3465,7 +3592,7 @@
               <a:buChar char="•"/>
             </a:pPr>
             <a:r>
-              <a:rPr lang="en-US" sz="1200" dirty="0">
+              <a:rPr lang="en-US" sz="1500" dirty="0">
                 <a:solidFill>
                   <a:srgbClr val="212121"/>
                 </a:solidFill>
@@ -3473,9 +3600,30 @@
                 <a:ea typeface="Calibri" pitchFamily="34" charset="-122"/>
                 <a:cs typeface="Calibri" pitchFamily="34" charset="-120"/>
               </a:rPr>
-              <a:t>Judge as a check, not truth — cross-check with the reason field and spot-check the actual failures.</a:t>
-            </a:r>
-            <a:endParaRPr lang="en-US" sz="1200" dirty="0"/>
+              <a:t>Change one thing (chunk size, top_k, prompt, model)</a:t>
+            </a:r>
+            <a:endParaRPr lang="en-US" sz="1500" dirty="0"/>
+          </a:p>
+          <a:p>
+            <a:pPr marL="342900" indent="-342900">
+              <a:spcAft>
+                <a:spcPts val="600"/>
+              </a:spcAft>
+              <a:buSzPct val="100000"/>
+              <a:buChar char="•"/>
+            </a:pPr>
+            <a:r>
+              <a:rPr lang="en-US" sz="1500" dirty="0">
+                <a:solidFill>
+                  <a:srgbClr val="212121"/>
+                </a:solidFill>
+                <a:latin typeface="Calibri" pitchFamily="34" charset="0"/>
+                <a:ea typeface="Calibri" pitchFamily="34" charset="-122"/>
+                <a:cs typeface="Calibri" pitchFamily="34" charset="-120"/>
+              </a:rPr>
+              <a:t>Rerun. Compare scores.</a:t>
+            </a:r>
+            <a:endParaRPr lang="en-US" sz="1500" dirty="0"/>
           </a:p>
         </p:txBody>
       </p:sp>
@@ -3487,6 +3635,45 @@
         </p:nvSpPr>
         <p:spPr>
           <a:xfrm>
+            <a:off x="365760" y="3886200"/>
+            <a:ext cx="8412480" cy="365760"/>
+          </a:xfrm>
+          <a:prstGeom prst="rect">
+            <a:avLst/>
+          </a:prstGeom>
+          <a:noFill/>
+          <a:ln/>
+        </p:spPr>
+        <p:txBody>
+          <a:bodyPr wrap="square" rtlCol="0" anchor="ctr"/>
+          <a:lstStyle/>
+          <a:p>
+            <a:pPr indent="0" marL="0">
+              <a:buNone/>
+            </a:pPr>
+            <a:r>
+              <a:rPr lang="en-US" sz="1300" b="1" i="1" dirty="0">
+                <a:solidFill>
+                  <a:srgbClr val="1E2761"/>
+                </a:solidFill>
+                <a:latin typeface="Calibri" pitchFamily="34" charset="0"/>
+                <a:ea typeface="Calibri" pitchFamily="34" charset="-122"/>
+                <a:cs typeface="Calibri" pitchFamily="34" charset="-120"/>
+              </a:rPr>
+              <a:t>Change one thing at a time. Three changes at once = you learned nothing about what worked.</a:t>
+            </a:r>
+            <a:endParaRPr lang="en-US" sz="1300" dirty="0"/>
+          </a:p>
+        </p:txBody>
+      </p:sp>
+      <p:sp>
+        <p:nvSpPr>
+          <p:cNvPr id="8" name="Text 6"/>
+          <p:cNvSpPr/>
+          <p:nvPr/>
+        </p:nvSpPr>
+        <p:spPr>
+          <a:xfrm>
             <a:off x="365760" y="4343400"/>
             <a:ext cx="8412480" cy="365760"/>
           </a:xfrm>
@@ -3512,7 +3699,7 @@
                 <a:ea typeface="Calibri" pitchFamily="34" charset="-122"/>
                 <a:cs typeface="Calibri" pitchFamily="34" charset="-120"/>
               </a:rPr>
-              <a:t>Day 5 covers online eval and drift more deeply. Today: know the judge isn't infallible.</a:t>
+              <a:t>Same discipline shows up Day 4 for multi-agent workflow eval.</a:t>
             </a:r>
             <a:endParaRPr lang="en-US" sz="1200" dirty="0"/>
           </a:p>
@@ -3642,7 +3829,7 @@
                 <a:ea typeface="Calibri" pitchFamily="34" charset="-122"/>
                 <a:cs typeface="Calibri" pitchFamily="34" charset="-120"/>
               </a:rPr>
-              <a:t>Common traps</a:t>
+              <a:t>LLM-as-judge caveats</a:t>
             </a:r>
             <a:endParaRPr lang="en-US" sz="2800" dirty="0"/>
           </a:p>
@@ -3657,7 +3844,46 @@
         <p:spPr>
           <a:xfrm>
             <a:off x="365760" y="1097280"/>
-            <a:ext cx="8412480" cy="3200400"/>
+            <a:ext cx="8412480" cy="365760"/>
+          </a:xfrm>
+          <a:prstGeom prst="rect">
+            <a:avLst/>
+          </a:prstGeom>
+          <a:noFill/>
+          <a:ln/>
+        </p:spPr>
+        <p:txBody>
+          <a:bodyPr wrap="square" rtlCol="0" anchor="ctr"/>
+          <a:lstStyle/>
+          <a:p>
+            <a:pPr indent="0" marL="0">
+              <a:buNone/>
+            </a:pPr>
+            <a:r>
+              <a:rPr lang="en-US" sz="1400" dirty="0">
+                <a:solidFill>
+                  <a:srgbClr val="212121"/>
+                </a:solidFill>
+                <a:latin typeface="Calibri" pitchFamily="34" charset="0"/>
+                <a:ea typeface="Calibri" pitchFamily="34" charset="-122"/>
+                <a:cs typeface="Calibri" pitchFamily="34" charset="-120"/>
+              </a:rPr>
+              <a:t>You're using an LLM to judge an LLM. Some caveats:</a:t>
+            </a:r>
+            <a:endParaRPr lang="en-US" sz="1400" dirty="0"/>
+          </a:p>
+        </p:txBody>
+      </p:sp>
+      <p:sp>
+        <p:nvSpPr>
+          <p:cNvPr id="6" name="Text 4"/>
+          <p:cNvSpPr/>
+          <p:nvPr/>
+        </p:nvSpPr>
+        <p:spPr>
+          <a:xfrm>
+            <a:off x="365760" y="1417320"/>
+            <a:ext cx="8412480" cy="2651760"/>
           </a:xfrm>
           <a:prstGeom prst="rect">
             <a:avLst/>
@@ -3685,7 +3911,7 @@
                 <a:ea typeface="Calibri" pitchFamily="34" charset="-122"/>
                 <a:cs typeface="Calibri" pitchFamily="34" charset="-120"/>
               </a:rPr>
-              <a:t>Testing end-to-end only — a bad answer might be retrieval OR generation; can't tell without process eval</a:t>
+              <a:t>Judge bias — the judge model has preferences. Same prompt, different judges = different scores.</a:t>
             </a:r>
             <a:endParaRPr lang="en-US" sz="1200" dirty="0"/>
           </a:p>
@@ -3706,7 +3932,7 @@
                 <a:ea typeface="Calibri" pitchFamily="34" charset="-122"/>
                 <a:cs typeface="Calibri" pitchFamily="34" charset="-120"/>
               </a:rPr>
-              <a:t>Test set too small — 3 items = coin flip; 10–15 is the useful floor</a:t>
+              <a:t>Judge cost — every eval item is an extra LLM call. Budget accordingly.</a:t>
             </a:r>
             <a:endParaRPr lang="en-US" sz="1200" dirty="0"/>
           </a:p>
@@ -3727,7 +3953,7 @@
                 <a:ea typeface="Calibri" pitchFamily="34" charset="-122"/>
                 <a:cs typeface="Calibri" pitchFamily="34" charset="-120"/>
               </a:rPr>
-              <a:t>Test set too large — every eval run costs LLM calls; 50 hand-labeled &gt; 5,000 unlabeled</a:t>
+              <a:t>Judge drift — model updates can shift baseline scores. Version-pin your judge.</a:t>
             </a:r>
             <a:endParaRPr lang="en-US" sz="1200" dirty="0"/>
           </a:p>
@@ -3748,49 +3974,46 @@
                 <a:ea typeface="Calibri" pitchFamily="34" charset="-122"/>
                 <a:cs typeface="Calibri" pitchFamily="34" charset="-120"/>
               </a:rPr>
-              <a:t>Changing three things at once — you learn nothing about what worked</a:t>
+              <a:t>Judge as a check, not truth — cross-check with the reason field and spot-check the actual failures.</a:t>
             </a:r>
             <a:endParaRPr lang="en-US" sz="1200" dirty="0"/>
           </a:p>
-          <a:p>
-            <a:pPr marL="342900" indent="-342900">
-              <a:spcAft>
-                <a:spcPts val="600"/>
-              </a:spcAft>
-              <a:buSzPct val="100000"/>
-              <a:buChar char="•"/>
-            </a:pPr>
-            <a:r>
-              <a:rPr lang="en-US" sz="1200" dirty="0">
-                <a:solidFill>
-                  <a:srgbClr val="212121"/>
-                </a:solidFill>
-                <a:latin typeface="Calibri" pitchFamily="34" charset="0"/>
-                <a:ea typeface="Calibri" pitchFamily="34" charset="-122"/>
-                <a:cs typeface="Calibri" pitchFamily="34" charset="-120"/>
-              </a:rPr>
-              <a:t>Ignoring the reason field — score tells you if it failed; reason tells you why</a:t>
-            </a:r>
-            <a:endParaRPr lang="en-US" sz="1200" dirty="0"/>
-          </a:p>
-          <a:p>
-            <a:pPr marL="342900" indent="-342900">
-              <a:spcAft>
-                <a:spcPts val="600"/>
-              </a:spcAft>
-              <a:buSzPct val="100000"/>
-              <a:buChar char="•"/>
-            </a:pPr>
-            <a:r>
-              <a:rPr lang="en-US" sz="1200" dirty="0">
-                <a:solidFill>
-                  <a:srgbClr val="212121"/>
-                </a:solidFill>
-                <a:latin typeface="Calibri" pitchFamily="34" charset="0"/>
-                <a:ea typeface="Calibri" pitchFamily="34" charset="-122"/>
-                <a:cs typeface="Calibri" pitchFamily="34" charset="-120"/>
-              </a:rPr>
-              <a:t>Judge model = production model — conflict of interest; use a different (usually smaller) judge</a:t>
+        </p:txBody>
+      </p:sp>
+      <p:sp>
+        <p:nvSpPr>
+          <p:cNvPr id="7" name="Text 5"/>
+          <p:cNvSpPr/>
+          <p:nvPr/>
+        </p:nvSpPr>
+        <p:spPr>
+          <a:xfrm>
+            <a:off x="365760" y="4343400"/>
+            <a:ext cx="8412480" cy="365760"/>
+          </a:xfrm>
+          <a:prstGeom prst="rect">
+            <a:avLst/>
+          </a:prstGeom>
+          <a:noFill/>
+          <a:ln/>
+        </p:spPr>
+        <p:txBody>
+          <a:bodyPr wrap="square" rtlCol="0" anchor="ctr"/>
+          <a:lstStyle/>
+          <a:p>
+            <a:pPr indent="0" marL="0">
+              <a:buNone/>
+            </a:pPr>
+            <a:r>
+              <a:rPr lang="en-US" sz="1200" i="1" dirty="0">
+                <a:solidFill>
+                  <a:srgbClr val="6B7280"/>
+                </a:solidFill>
+                <a:latin typeface="Calibri" pitchFamily="34" charset="0"/>
+                <a:ea typeface="Calibri" pitchFamily="34" charset="-122"/>
+                <a:cs typeface="Calibri" pitchFamily="34" charset="-120"/>
+              </a:rPr>
+              <a:t>Day 5 covers online eval and drift more deeply. Today: know the judge isn't infallible.</a:t>
             </a:r>
             <a:endParaRPr lang="en-US" sz="1200" dirty="0"/>
           </a:p>
@@ -3920,7 +4143,7 @@
                 <a:ea typeface="Calibri" pitchFamily="34" charset="-122"/>
                 <a:cs typeface="Calibri" pitchFamily="34" charset="-120"/>
               </a:rPr>
-              <a:t>Where eval shows up the rest of the week</a:t>
+              <a:t>Common traps</a:t>
             </a:r>
             <a:endParaRPr lang="en-US" sz="2800" dirty="0"/>
           </a:p>
@@ -3935,7 +4158,7 @@
         <p:spPr>
           <a:xfrm>
             <a:off x="365760" y="1097280"/>
-            <a:ext cx="8412480" cy="2286000"/>
+            <a:ext cx="8412480" cy="3200400"/>
           </a:xfrm>
           <a:prstGeom prst="rect">
             <a:avLst/>
@@ -3955,7 +4178,7 @@
               <a:buChar char="•"/>
             </a:pPr>
             <a:r>
-              <a:rPr lang="en-US" sz="1300" dirty="0">
+              <a:rPr lang="en-US" sz="1200" dirty="0">
                 <a:solidFill>
                   <a:srgbClr val="212121"/>
                 </a:solidFill>
@@ -3963,9 +4186,9 @@
                 <a:ea typeface="Calibri" pitchFamily="34" charset="-122"/>
                 <a:cs typeface="Calibri" pitchFamily="34" charset="-120"/>
               </a:rPr>
-              <a:t>Day 3 (single-agent depth) — evaluator patterns extend to tool-use correctness</a:t>
-            </a:r>
-            <a:endParaRPr lang="en-US" sz="1300" dirty="0"/>
+              <a:t>Testing end-to-end only — a bad answer might be retrieval OR generation; can't tell without process eval</a:t>
+            </a:r>
+            <a:endParaRPr lang="en-US" sz="1200" dirty="0"/>
           </a:p>
           <a:p>
             <a:pPr marL="342900" indent="-342900">
@@ -3976,7 +4199,7 @@
               <a:buChar char="•"/>
             </a:pPr>
             <a:r>
-              <a:rPr lang="en-US" sz="1300" dirty="0">
+              <a:rPr lang="en-US" sz="1200" dirty="0">
                 <a:solidFill>
                   <a:srgbClr val="212121"/>
                 </a:solidFill>
@@ -3984,9 +4207,9 @@
                 <a:ea typeface="Calibri" pitchFamily="34" charset="-122"/>
                 <a:cs typeface="Calibri" pitchFamily="34" charset="-120"/>
               </a:rPr>
-              <a:t>Day 4 (multi-agent anchor) — trajectory eval, cost-per-successful-outcome, regression harness</a:t>
-            </a:r>
-            <a:endParaRPr lang="en-US" sz="1300" dirty="0"/>
+              <a:t>Test set too small — 3 items = coin flip; 10–15 is the useful floor</a:t>
+            </a:r>
+            <a:endParaRPr lang="en-US" sz="1200" dirty="0"/>
           </a:p>
           <a:p>
             <a:pPr marL="342900" indent="-342900">
@@ -3997,7 +4220,7 @@
               <a:buChar char="•"/>
             </a:pPr>
             <a:r>
-              <a:rPr lang="en-US" sz="1300" dirty="0">
+              <a:rPr lang="en-US" sz="1200" dirty="0">
                 <a:solidFill>
                   <a:srgbClr val="212121"/>
                 </a:solidFill>
@@ -4005,9 +4228,9 @@
                 <a:ea typeface="Calibri" pitchFamily="34" charset="-122"/>
                 <a:cs typeface="Calibri" pitchFamily="34" charset="-120"/>
               </a:rPr>
-              <a:t>Day 5 (production) — online eval, drift detection, red-teaming</a:t>
-            </a:r>
-            <a:endParaRPr lang="en-US" sz="1300" dirty="0"/>
+              <a:t>Test set too large — every eval run costs LLM calls; 50 hand-labeled &gt; 5,000 unlabeled</a:t>
+            </a:r>
+            <a:endParaRPr lang="en-US" sz="1200" dirty="0"/>
           </a:p>
           <a:p>
             <a:pPr marL="342900" indent="-342900">
@@ -4018,7 +4241,7 @@
               <a:buChar char="•"/>
             </a:pPr>
             <a:r>
-              <a:rPr lang="en-US" sz="1300" dirty="0">
+              <a:rPr lang="en-US" sz="1200" dirty="0">
                 <a:solidFill>
                   <a:srgbClr val="212121"/>
                 </a:solidFill>
@@ -4026,48 +4249,51 @@
                 <a:ea typeface="Calibri" pitchFamily="34" charset="-122"/>
                 <a:cs typeface="Calibri" pitchFamily="34" charset="-120"/>
               </a:rPr>
-              <a:t>Capstone — required elements include a golden set + eval scores</a:t>
-            </a:r>
-            <a:endParaRPr lang="en-US" sz="1300" dirty="0"/>
-          </a:p>
-        </p:txBody>
-      </p:sp>
-      <p:sp>
-        <p:nvSpPr>
-          <p:cNvPr id="6" name="Text 4"/>
-          <p:cNvSpPr/>
-          <p:nvPr/>
-        </p:nvSpPr>
-        <p:spPr>
-          <a:xfrm>
-            <a:off x="365760" y="4160520"/>
-            <a:ext cx="8412480" cy="365760"/>
-          </a:xfrm>
-          <a:prstGeom prst="rect">
-            <a:avLst/>
-          </a:prstGeom>
-          <a:noFill/>
-          <a:ln/>
-        </p:spPr>
-        <p:txBody>
-          <a:bodyPr wrap="square" rtlCol="0" anchor="ctr"/>
-          <a:lstStyle/>
-          <a:p>
-            <a:pPr indent="0" marL="0">
-              <a:buNone/>
-            </a:pPr>
-            <a:r>
-              <a:rPr lang="en-US" sz="1300" b="1" i="1" dirty="0">
-                <a:solidFill>
-                  <a:srgbClr val="1E2761"/>
-                </a:solidFill>
-                <a:latin typeface="Calibri" pitchFamily="34" charset="0"/>
-                <a:ea typeface="Calibri" pitchFamily="34" charset="-122"/>
-                <a:cs typeface="Calibri" pitchFamily="34" charset="-120"/>
-              </a:rPr>
-              <a:t>The habit that starts today runs through the whole week.</a:t>
-            </a:r>
-            <a:endParaRPr lang="en-US" sz="1300" dirty="0"/>
+              <a:t>Changing three things at once — you learn nothing about what worked</a:t>
+            </a:r>
+            <a:endParaRPr lang="en-US" sz="1200" dirty="0"/>
+          </a:p>
+          <a:p>
+            <a:pPr marL="342900" indent="-342900">
+              <a:spcAft>
+                <a:spcPts val="600"/>
+              </a:spcAft>
+              <a:buSzPct val="100000"/>
+              <a:buChar char="•"/>
+            </a:pPr>
+            <a:r>
+              <a:rPr lang="en-US" sz="1200" dirty="0">
+                <a:solidFill>
+                  <a:srgbClr val="212121"/>
+                </a:solidFill>
+                <a:latin typeface="Calibri" pitchFamily="34" charset="0"/>
+                <a:ea typeface="Calibri" pitchFamily="34" charset="-122"/>
+                <a:cs typeface="Calibri" pitchFamily="34" charset="-120"/>
+              </a:rPr>
+              <a:t>Ignoring the reason field — score tells you if it failed; reason tells you why</a:t>
+            </a:r>
+            <a:endParaRPr lang="en-US" sz="1200" dirty="0"/>
+          </a:p>
+          <a:p>
+            <a:pPr marL="342900" indent="-342900">
+              <a:spcAft>
+                <a:spcPts val="600"/>
+              </a:spcAft>
+              <a:buSzPct val="100000"/>
+              <a:buChar char="•"/>
+            </a:pPr>
+            <a:r>
+              <a:rPr lang="en-US" sz="1200" dirty="0">
+                <a:solidFill>
+                  <a:srgbClr val="212121"/>
+                </a:solidFill>
+                <a:latin typeface="Calibri" pitchFamily="34" charset="0"/>
+                <a:ea typeface="Calibri" pitchFamily="34" charset="-122"/>
+                <a:cs typeface="Calibri" pitchFamily="34" charset="-120"/>
+              </a:rPr>
+              <a:t>Judge model = production model — conflict of interest; use a different (usually smaller) judge</a:t>
+            </a:r>
+            <a:endParaRPr lang="en-US" sz="1200" dirty="0"/>
           </a:p>
         </p:txBody>
       </p:sp>
@@ -4082,6 +4308,281 @@
 <file path=ppt/slides/slide15.xml><?xml version="1.0" encoding="utf-8"?>
 <p:sld xmlns:a="http://schemas.openxmlformats.org/drawingml/2006/main" xmlns:r="http://schemas.openxmlformats.org/officeDocument/2006/relationships" xmlns:p="http://schemas.openxmlformats.org/presentationml/2006/main">
   <p:cSld name="Slide 15">
+    <p:bg>
+      <p:bgPr>
+        <a:solidFill>
+          <a:srgbClr val="FFFFFF"/>
+        </a:solidFill>
+      </p:bgPr>
+    </p:bg>
+    <p:spTree>
+      <p:nvGrpSpPr>
+        <p:cNvPr id="1" name=""/>
+        <p:cNvGrpSpPr/>
+        <p:nvPr/>
+      </p:nvGrpSpPr>
+      <p:grpSpPr>
+        <a:xfrm>
+          <a:off x="0" y="0"/>
+          <a:ext cx="0" cy="0"/>
+          <a:chOff x="0" y="0"/>
+          <a:chExt cx="0" cy="0"/>
+        </a:xfrm>
+      </p:grpSpPr>
+      <p:sp>
+        <p:nvSpPr>
+          <p:cNvPr id="2" name="Shape 0"/>
+          <p:cNvSpPr/>
+          <p:nvPr/>
+        </p:nvSpPr>
+        <p:spPr>
+          <a:xfrm>
+            <a:off x="0" y="0"/>
+            <a:ext cx="54864" cy="5143500"/>
+          </a:xfrm>
+          <a:prstGeom prst="rect">
+            <a:avLst/>
+          </a:prstGeom>
+          <a:solidFill>
+            <a:srgbClr val="1E2761"/>
+          </a:solidFill>
+          <a:ln/>
+        </p:spPr>
+      </p:sp>
+      <p:sp>
+        <p:nvSpPr>
+          <p:cNvPr id="3" name="Text 1"/>
+          <p:cNvSpPr/>
+          <p:nvPr/>
+        </p:nvSpPr>
+        <p:spPr>
+          <a:xfrm>
+            <a:off x="5669280" y="274320"/>
+            <a:ext cx="3291840" cy="274320"/>
+          </a:xfrm>
+          <a:prstGeom prst="rect">
+            <a:avLst/>
+          </a:prstGeom>
+          <a:noFill/>
+          <a:ln/>
+        </p:spPr>
+        <p:txBody>
+          <a:bodyPr wrap="square" lIns="0" tIns="0" rIns="0" bIns="0" rtlCol="0" anchor="ctr"/>
+          <a:lstStyle/>
+          <a:p>
+            <a:pPr algn="r" indent="0" marL="0">
+              <a:buNone/>
+            </a:pPr>
+            <a:r>
+              <a:rPr lang="en-US" sz="1000" dirty="0">
+                <a:solidFill>
+                  <a:srgbClr val="6B7280"/>
+                </a:solidFill>
+                <a:latin typeface="Calibri" pitchFamily="34" charset="0"/>
+                <a:ea typeface="Calibri" pitchFamily="34" charset="-122"/>
+                <a:cs typeface="Calibri" pitchFamily="34" charset="-120"/>
+              </a:rPr>
+              <a:t>Day 2 · Module 3</a:t>
+            </a:r>
+            <a:endParaRPr lang="en-US" sz="1000" dirty="0"/>
+          </a:p>
+        </p:txBody>
+      </p:sp>
+      <p:sp>
+        <p:nvSpPr>
+          <p:cNvPr id="4" name="Text 2"/>
+          <p:cNvSpPr/>
+          <p:nvPr/>
+        </p:nvSpPr>
+        <p:spPr>
+          <a:xfrm>
+            <a:off x="365760" y="320040"/>
+            <a:ext cx="6217920" cy="640080"/>
+          </a:xfrm>
+          <a:prstGeom prst="rect">
+            <a:avLst/>
+          </a:prstGeom>
+          <a:noFill/>
+          <a:ln/>
+        </p:spPr>
+        <p:txBody>
+          <a:bodyPr wrap="square" lIns="0" tIns="0" rIns="0" bIns="0" rtlCol="0" anchor="ctr"/>
+          <a:lstStyle/>
+          <a:p>
+            <a:pPr indent="0" marL="0">
+              <a:buNone/>
+            </a:pPr>
+            <a:r>
+              <a:rPr lang="en-US" sz="2800" b="1" dirty="0">
+                <a:solidFill>
+                  <a:srgbClr val="1E2761"/>
+                </a:solidFill>
+                <a:latin typeface="Calibri" pitchFamily="34" charset="0"/>
+                <a:ea typeface="Calibri" pitchFamily="34" charset="-122"/>
+                <a:cs typeface="Calibri" pitchFamily="34" charset="-120"/>
+              </a:rPr>
+              <a:t>Where eval shows up the rest of the week</a:t>
+            </a:r>
+            <a:endParaRPr lang="en-US" sz="2800" dirty="0"/>
+          </a:p>
+        </p:txBody>
+      </p:sp>
+      <p:sp>
+        <p:nvSpPr>
+          <p:cNvPr id="5" name="Text 3"/>
+          <p:cNvSpPr/>
+          <p:nvPr/>
+        </p:nvSpPr>
+        <p:spPr>
+          <a:xfrm>
+            <a:off x="365760" y="1097280"/>
+            <a:ext cx="8412480" cy="2286000"/>
+          </a:xfrm>
+          <a:prstGeom prst="rect">
+            <a:avLst/>
+          </a:prstGeom>
+          <a:noFill/>
+          <a:ln/>
+        </p:spPr>
+        <p:txBody>
+          <a:bodyPr wrap="square" rtlCol="0" anchor="ctr"/>
+          <a:lstStyle/>
+          <a:p>
+            <a:pPr marL="342900" indent="-342900">
+              <a:spcAft>
+                <a:spcPts val="600"/>
+              </a:spcAft>
+              <a:buSzPct val="100000"/>
+              <a:buChar char="•"/>
+            </a:pPr>
+            <a:r>
+              <a:rPr lang="en-US" sz="1300" dirty="0">
+                <a:solidFill>
+                  <a:srgbClr val="212121"/>
+                </a:solidFill>
+                <a:latin typeface="Calibri" pitchFamily="34" charset="0"/>
+                <a:ea typeface="Calibri" pitchFamily="34" charset="-122"/>
+                <a:cs typeface="Calibri" pitchFamily="34" charset="-120"/>
+              </a:rPr>
+              <a:t>Day 3 (single-agent depth) — evaluator patterns extend to tool-use correctness</a:t>
+            </a:r>
+            <a:endParaRPr lang="en-US" sz="1300" dirty="0"/>
+          </a:p>
+          <a:p>
+            <a:pPr marL="342900" indent="-342900">
+              <a:spcAft>
+                <a:spcPts val="600"/>
+              </a:spcAft>
+              <a:buSzPct val="100000"/>
+              <a:buChar char="•"/>
+            </a:pPr>
+            <a:r>
+              <a:rPr lang="en-US" sz="1300" dirty="0">
+                <a:solidFill>
+                  <a:srgbClr val="212121"/>
+                </a:solidFill>
+                <a:latin typeface="Calibri" pitchFamily="34" charset="0"/>
+                <a:ea typeface="Calibri" pitchFamily="34" charset="-122"/>
+                <a:cs typeface="Calibri" pitchFamily="34" charset="-120"/>
+              </a:rPr>
+              <a:t>Day 4 (multi-agent anchor) — trajectory eval, cost-per-successful-outcome, regression harness</a:t>
+            </a:r>
+            <a:endParaRPr lang="en-US" sz="1300" dirty="0"/>
+          </a:p>
+          <a:p>
+            <a:pPr marL="342900" indent="-342900">
+              <a:spcAft>
+                <a:spcPts val="600"/>
+              </a:spcAft>
+              <a:buSzPct val="100000"/>
+              <a:buChar char="•"/>
+            </a:pPr>
+            <a:r>
+              <a:rPr lang="en-US" sz="1300" dirty="0">
+                <a:solidFill>
+                  <a:srgbClr val="212121"/>
+                </a:solidFill>
+                <a:latin typeface="Calibri" pitchFamily="34" charset="0"/>
+                <a:ea typeface="Calibri" pitchFamily="34" charset="-122"/>
+                <a:cs typeface="Calibri" pitchFamily="34" charset="-120"/>
+              </a:rPr>
+              <a:t>Day 5 (production) — online eval, drift detection, red-teaming</a:t>
+            </a:r>
+            <a:endParaRPr lang="en-US" sz="1300" dirty="0"/>
+          </a:p>
+          <a:p>
+            <a:pPr marL="342900" indent="-342900">
+              <a:spcAft>
+                <a:spcPts val="600"/>
+              </a:spcAft>
+              <a:buSzPct val="100000"/>
+              <a:buChar char="•"/>
+            </a:pPr>
+            <a:r>
+              <a:rPr lang="en-US" sz="1300" dirty="0">
+                <a:solidFill>
+                  <a:srgbClr val="212121"/>
+                </a:solidFill>
+                <a:latin typeface="Calibri" pitchFamily="34" charset="0"/>
+                <a:ea typeface="Calibri" pitchFamily="34" charset="-122"/>
+                <a:cs typeface="Calibri" pitchFamily="34" charset="-120"/>
+              </a:rPr>
+              <a:t>Capstone — required elements include a golden set + eval scores</a:t>
+            </a:r>
+            <a:endParaRPr lang="en-US" sz="1300" dirty="0"/>
+          </a:p>
+        </p:txBody>
+      </p:sp>
+      <p:sp>
+        <p:nvSpPr>
+          <p:cNvPr id="6" name="Text 4"/>
+          <p:cNvSpPr/>
+          <p:nvPr/>
+        </p:nvSpPr>
+        <p:spPr>
+          <a:xfrm>
+            <a:off x="365760" y="4160520"/>
+            <a:ext cx="8412480" cy="365760"/>
+          </a:xfrm>
+          <a:prstGeom prst="rect">
+            <a:avLst/>
+          </a:prstGeom>
+          <a:noFill/>
+          <a:ln/>
+        </p:spPr>
+        <p:txBody>
+          <a:bodyPr wrap="square" rtlCol="0" anchor="ctr"/>
+          <a:lstStyle/>
+          <a:p>
+            <a:pPr indent="0" marL="0">
+              <a:buNone/>
+            </a:pPr>
+            <a:r>
+              <a:rPr lang="en-US" sz="1300" b="1" i="1" dirty="0">
+                <a:solidFill>
+                  <a:srgbClr val="1E2761"/>
+                </a:solidFill>
+                <a:latin typeface="Calibri" pitchFamily="34" charset="0"/>
+                <a:ea typeface="Calibri" pitchFamily="34" charset="-122"/>
+                <a:cs typeface="Calibri" pitchFamily="34" charset="-120"/>
+              </a:rPr>
+              <a:t>The habit that starts today runs through the whole week.</a:t>
+            </a:r>
+            <a:endParaRPr lang="en-US" sz="1300" dirty="0"/>
+          </a:p>
+        </p:txBody>
+      </p:sp>
+    </p:spTree>
+  </p:cSld>
+  <p:clrMapOvr>
+    <a:masterClrMapping/>
+  </p:clrMapOvr>
+</p:sld>
+</file>
+
+<file path=ppt/slides/slide16.xml><?xml version="1.0" encoding="utf-8"?>
+<p:sld xmlns:a="http://schemas.openxmlformats.org/drawingml/2006/main" xmlns:r="http://schemas.openxmlformats.org/officeDocument/2006/relationships" xmlns:p="http://schemas.openxmlformats.org/presentationml/2006/main">
+  <p:cSld name="Slide 16">
     <p:bg>
       <p:bgPr>
         <a:solidFill>
@@ -7688,7 +8189,7 @@
     <p:bg>
       <p:bgPr>
         <a:solidFill>
-          <a:srgbClr val="FFFFFF"/>
+          <a:srgbClr val="CADCFC"/>
         </a:solidFill>
       </p:bgPr>
     </p:bg>
@@ -7715,7 +8216,7 @@
         <p:spPr>
           <a:xfrm>
             <a:off x="0" y="0"/>
-            <a:ext cx="54864" cy="5143500"/>
+            <a:ext cx="146304" cy="5143500"/>
           </a:xfrm>
           <a:prstGeom prst="rect">
             <a:avLst/>
@@ -7759,7 +8260,7 @@
                 <a:ea typeface="Calibri" pitchFamily="34" charset="-122"/>
                 <a:cs typeface="Calibri" pitchFamily="34" charset="-120"/>
               </a:rPr>
-              <a:t>Day 2 · Module 3</a:t>
+              <a:t>Day 2 · Module 3 · Demo</a:t>
             </a:r>
             <a:endParaRPr lang="en-US" sz="1000" dirty="0"/>
           </a:p>
@@ -7773,8 +8274,8 @@
         </p:nvSpPr>
         <p:spPr>
           <a:xfrm>
-            <a:off x="365760" y="320040"/>
-            <a:ext cx="6217920" cy="640080"/>
+            <a:off x="548640" y="1051560"/>
+            <a:ext cx="5486400" cy="502920"/>
           </a:xfrm>
           <a:prstGeom prst="rect">
             <a:avLst/>
@@ -7790,7 +8291,7 @@
               <a:buNone/>
             </a:pPr>
             <a:r>
-              <a:rPr lang="en-US" sz="2800" b="1" dirty="0">
+              <a:rPr lang="en-US" sz="3200" b="1" spc="800" kern="0" dirty="0">
                 <a:solidFill>
                   <a:srgbClr val="1E2761"/>
                 </a:solidFill>
@@ -7798,9 +8299,9 @@
                 <a:ea typeface="Calibri" pitchFamily="34" charset="-122"/>
                 <a:cs typeface="Calibri" pitchFamily="34" charset="-120"/>
               </a:rPr>
-              <a:t>Groundedness vs. Response Completeness</a:t>
-            </a:r>
-            <a:endParaRPr lang="en-US" sz="2800" dirty="0"/>
+              <a:t>DEMO</a:t>
+            </a:r>
+            <a:endParaRPr lang="en-US" sz="3200" dirty="0"/>
           </a:p>
         </p:txBody>
       </p:sp>
@@ -7812,8 +8313,8 @@
         </p:nvSpPr>
         <p:spPr>
           <a:xfrm>
-            <a:off x="365760" y="1097280"/>
-            <a:ext cx="8412480" cy="274320"/>
+            <a:off x="548640" y="1691640"/>
+            <a:ext cx="8046720" cy="914400"/>
           </a:xfrm>
           <a:prstGeom prst="rect">
             <a:avLst/>
@@ -7822,24 +8323,24 @@
           <a:ln/>
         </p:spPr>
         <p:txBody>
-          <a:bodyPr wrap="square" rtlCol="0" anchor="ctr"/>
+          <a:bodyPr wrap="square" lIns="0" tIns="0" rIns="0" bIns="0" rtlCol="0" anchor="ctr"/>
           <a:lstStyle/>
           <a:p>
             <a:pPr indent="0" marL="0">
               <a:buNone/>
             </a:pPr>
             <a:r>
-              <a:rPr lang="en-US" sz="1400" i="1" dirty="0">
-                <a:solidFill>
-                  <a:srgbClr val="212121"/>
-                </a:solidFill>
-                <a:latin typeface="Calibri" pitchFamily="34" charset="0"/>
-                <a:ea typeface="Calibri" pitchFamily="34" charset="-122"/>
-                <a:cs typeface="Calibri" pitchFamily="34" charset="-120"/>
-              </a:rPr>
-              <a:t>Two sides of the same coin:</a:t>
-            </a:r>
-            <a:endParaRPr lang="en-US" sz="1400" dirty="0"/>
+              <a:rPr lang="en-US" sz="3000" b="1" dirty="0">
+                <a:solidFill>
+                  <a:srgbClr val="1E2761"/>
+                </a:solidFill>
+                <a:latin typeface="Calibri" pitchFamily="34" charset="0"/>
+                <a:ea typeface="Calibri" pitchFamily="34" charset="-122"/>
+                <a:cs typeface="Calibri" pitchFamily="34" charset="-120"/>
+              </a:rPr>
+              <a:t>Score two agents live</a:t>
+            </a:r>
+            <a:endParaRPr lang="en-US" sz="3000" dirty="0"/>
           </a:p>
         </p:txBody>
       </p:sp>
@@ -7851,8 +8352,8 @@
         </p:nvSpPr>
         <p:spPr>
           <a:xfrm>
-            <a:off x="365760" y="1463040"/>
-            <a:ext cx="8412480" cy="1737360"/>
+            <a:off x="6583680" y="1051560"/>
+            <a:ext cx="2194560" cy="502920"/>
           </a:xfrm>
           <a:prstGeom prst="rect">
             <a:avLst/>
@@ -7861,18 +8362,56 @@
           <a:ln/>
         </p:spPr>
         <p:txBody>
-          <a:bodyPr wrap="square" rtlCol="0" anchor="ctr"/>
-          <a:lstStyle/>
-          <a:p>
-            <a:pPr marL="342900" indent="-342900">
+          <a:bodyPr wrap="square" lIns="0" tIns="0" rIns="0" bIns="0" rtlCol="0" anchor="ctr"/>
+          <a:lstStyle/>
+          <a:p>
+            <a:pPr algn="r" indent="0" marL="0">
+              <a:buNone/>
+            </a:pPr>
+            <a:r>
+              <a:rPr lang="en-US" sz="1800" i="1" dirty="0">
+                <a:solidFill>
+                  <a:srgbClr val="6B7280"/>
+                </a:solidFill>
+                <a:latin typeface="Calibri" pitchFamily="34" charset="0"/>
+                <a:ea typeface="Calibri" pitchFamily="34" charset="-122"/>
+                <a:cs typeface="Calibri" pitchFamily="34" charset="-120"/>
+              </a:rPr>
+              <a:t>~4 min</a:t>
+            </a:r>
+            <a:endParaRPr lang="en-US" sz="1800" dirty="0"/>
+          </a:p>
+        </p:txBody>
+      </p:sp>
+      <p:sp>
+        <p:nvSpPr>
+          <p:cNvPr id="7" name="Text 5"/>
+          <p:cNvSpPr/>
+          <p:nvPr/>
+        </p:nvSpPr>
+        <p:spPr>
+          <a:xfrm>
+            <a:off x="548640" y="2788920"/>
+            <a:ext cx="8046720" cy="1371600"/>
+          </a:xfrm>
+          <a:prstGeom prst="rect">
+            <a:avLst/>
+          </a:prstGeom>
+          <a:noFill/>
+          <a:ln/>
+        </p:spPr>
+        <p:txBody>
+          <a:bodyPr wrap="square" lIns="0" tIns="0" rIns="0" bIns="0" rtlCol="0" anchor="ctr"/>
+          <a:lstStyle/>
+          <a:p>
+            <a:pPr indent="0" marL="0">
               <a:spcAft>
                 <a:spcPts val="600"/>
               </a:spcAft>
-              <a:buSzPct val="100000"/>
-              <a:buChar char="•"/>
-            </a:pPr>
-            <a:r>
-              <a:rPr lang="en-US" sz="1500" dirty="0">
+              <a:buNone/>
+            </a:pPr>
+            <a:r>
+              <a:rPr lang="en-US" sz="1600" dirty="0">
                 <a:solidFill>
                   <a:srgbClr val="212121"/>
                 </a:solidFill>
@@ -7880,69 +8419,9 @@
                 <a:ea typeface="Calibri" pitchFamily="34" charset="-122"/>
                 <a:cs typeface="Calibri" pitchFamily="34" charset="-120"/>
               </a:rPr>
-              <a:t>Groundedness = precision. Did the response contain anything not in the context? (Fabrication check.)</a:t>
-            </a:r>
-            <a:endParaRPr lang="en-US" sz="1500" dirty="0"/>
-          </a:p>
-          <a:p>
-            <a:pPr marL="342900" indent="-342900">
-              <a:spcAft>
-                <a:spcPts val="600"/>
-              </a:spcAft>
-              <a:buSzPct val="100000"/>
-              <a:buChar char="•"/>
-            </a:pPr>
-            <a:r>
-              <a:rPr lang="en-US" sz="1500" dirty="0">
-                <a:solidFill>
-                  <a:srgbClr val="212121"/>
-                </a:solidFill>
-                <a:latin typeface="Calibri" pitchFamily="34" charset="0"/>
-                <a:ea typeface="Calibri" pitchFamily="34" charset="-122"/>
-                <a:cs typeface="Calibri" pitchFamily="34" charset="-120"/>
-              </a:rPr>
-              <a:t>Response Completeness = recall. Did the response leave anything out that the ground truth expected? (Coverage check.)</a:t>
-            </a:r>
-            <a:endParaRPr lang="en-US" sz="1500" dirty="0"/>
-          </a:p>
-        </p:txBody>
-      </p:sp>
-      <p:sp>
-        <p:nvSpPr>
-          <p:cNvPr id="7" name="Text 5"/>
-          <p:cNvSpPr/>
-          <p:nvPr/>
-        </p:nvSpPr>
-        <p:spPr>
-          <a:xfrm>
-            <a:off x="365760" y="3291840"/>
-            <a:ext cx="8412480" cy="1005840"/>
-          </a:xfrm>
-          <a:prstGeom prst="rect">
-            <a:avLst/>
-          </a:prstGeom>
-          <a:noFill/>
-          <a:ln/>
-        </p:spPr>
-        <p:txBody>
-          <a:bodyPr wrap="square" rtlCol="0" anchor="ctr"/>
-          <a:lstStyle/>
-          <a:p>
-            <a:pPr indent="0" marL="0">
-              <a:buNone/>
-            </a:pPr>
-            <a:r>
-              <a:rPr lang="en-US" sz="1300" dirty="0">
-                <a:solidFill>
-                  <a:srgbClr val="212121"/>
-                </a:solidFill>
-                <a:latin typeface="Calibri" pitchFamily="34" charset="0"/>
-                <a:ea typeface="Calibri" pitchFamily="34" charset="-122"/>
-                <a:cs typeface="Calibri" pitchFamily="34" charset="-120"/>
-              </a:rPr>
-              <a:t>A high-groundedness, low-completeness response is accurate but partial. A low-groundedness, high-completeness response is comprehensive but making things up. Track both.</a:t>
-            </a:r>
-            <a:endParaRPr lang="en-US" sz="1300" dirty="0"/>
+              <a:t>Two static transcripts — grounded (docs-assistant WITH IQ attached) and baseline (no knowledge source) — scored side-by-side with retrieval_eval.py. Grounded run clears the Retrieval ≥ 3.5 and Groundedness ≥ 4.0 thresholds. Baseline run refuses to score at all — the eval script hard-fails on empty context. That refusal is a real production signal.</a:t>
+            </a:r>
+            <a:endParaRPr lang="en-US" sz="1600" dirty="0"/>
           </a:p>
         </p:txBody>
       </p:sp>
@@ -7954,8 +8433,8 @@
         </p:nvSpPr>
         <p:spPr>
           <a:xfrm>
-            <a:off x="365760" y="4389120"/>
-            <a:ext cx="8412480" cy="365760"/>
+            <a:off x="548640" y="4434840"/>
+            <a:ext cx="8046720" cy="320040"/>
           </a:xfrm>
           <a:prstGeom prst="rect">
             <a:avLst/>
@@ -7964,14 +8443,14 @@
           <a:ln/>
         </p:spPr>
         <p:txBody>
-          <a:bodyPr wrap="square" rtlCol="0" anchor="ctr"/>
+          <a:bodyPr wrap="square" lIns="0" tIns="0" rIns="0" bIns="0" rtlCol="0" anchor="ctr"/>
           <a:lstStyle/>
           <a:p>
             <a:pPr indent="0" marL="0">
               <a:buNone/>
             </a:pPr>
             <a:r>
-              <a:rPr lang="en-US" sz="1200" i="1" dirty="0">
+              <a:rPr lang="en-US" sz="1100" i="1" dirty="0">
                 <a:solidFill>
                   <a:srgbClr val="6B7280"/>
                 </a:solidFill>
@@ -7979,9 +8458,9 @@
                 <a:ea typeface="Calibri" pitchFamily="34" charset="-122"/>
                 <a:cs typeface="Calibri" pitchFamily="34" charset="-120"/>
               </a:rPr>
-              <a:t>Response Completeness needs ground truth — invest when you have a benchmark corpus.</a:t>
-            </a:r>
-            <a:endParaRPr lang="en-US" sz="1200" dirty="0"/>
+              <a:t>Runbook: demos/day2/module-3-demo-1-score-two-agents.md · Files: demos/day2/module-3-demo-1-score-two-agents/</a:t>
+            </a:r>
+            <a:endParaRPr lang="en-US" sz="1100" dirty="0"/>
           </a:p>
         </p:txBody>
       </p:sp>
@@ -8109,7 +8588,7 @@
                 <a:ea typeface="Calibri" pitchFamily="34" charset="-122"/>
                 <a:cs typeface="Calibri" pitchFamily="34" charset="-120"/>
               </a:rPr>
-              <a:t>Document Retrieval — the deep debug tool</a:t>
+              <a:t>Groundedness vs. Response Completeness</a:t>
             </a:r>
             <a:endParaRPr lang="en-US" sz="2800" dirty="0"/>
           </a:p>
@@ -8124,7 +8603,7 @@
         <p:spPr>
           <a:xfrm>
             <a:off x="365760" y="1097280"/>
-            <a:ext cx="8412480" cy="457200"/>
+            <a:ext cx="8412480" cy="274320"/>
           </a:xfrm>
           <a:prstGeom prst="rect">
             <a:avLst/>
@@ -8148,7 +8627,7 @@
                 <a:ea typeface="Calibri" pitchFamily="34" charset="-122"/>
                 <a:cs typeface="Calibri" pitchFamily="34" charset="-120"/>
               </a:rPr>
-              <a:t>When retrieval quality is the bottleneck, this is your parameter-sweep evaluator.</a:t>
+              <a:t>Two sides of the same coin:</a:t>
             </a:r>
             <a:endParaRPr lang="en-US" sz="1400" dirty="0"/>
           </a:p>
@@ -8162,8 +8641,8 @@
         </p:nvSpPr>
         <p:spPr>
           <a:xfrm>
-            <a:off x="365760" y="1600200"/>
-            <a:ext cx="8412480" cy="2560320"/>
+            <a:off x="365760" y="1463040"/>
+            <a:ext cx="8412480" cy="1737360"/>
           </a:xfrm>
           <a:prstGeom prst="rect">
             <a:avLst/>
@@ -8183,7 +8662,7 @@
               <a:buChar char="•"/>
             </a:pPr>
             <a:r>
-              <a:rPr lang="en-US" sz="1200" dirty="0">
+              <a:rPr lang="en-US" sz="1500" dirty="0">
                 <a:solidFill>
                   <a:srgbClr val="212121"/>
                 </a:solidFill>
@@ -8191,9 +8670,9 @@
                 <a:ea typeface="Calibri" pitchFamily="34" charset="-122"/>
                 <a:cs typeface="Calibri" pitchFamily="34" charset="-120"/>
               </a:rPr>
-              <a:t>Input: query-relevance labels (qrels) and the ranked retrieval output</a:t>
-            </a:r>
-            <a:endParaRPr lang="en-US" sz="1200" dirty="0"/>
+              <a:t>Groundedness = precision. Did the response contain anything not in the context? (Fabrication check.)</a:t>
+            </a:r>
+            <a:endParaRPr lang="en-US" sz="1500" dirty="0"/>
           </a:p>
           <a:p>
             <a:pPr marL="342900" indent="-342900">
@@ -8204,7 +8683,7 @@
               <a:buChar char="•"/>
             </a:pPr>
             <a:r>
-              <a:rPr lang="en-US" sz="1200" dirty="0">
+              <a:rPr lang="en-US" sz="1500" dirty="0">
                 <a:solidFill>
                   <a:srgbClr val="212121"/>
                 </a:solidFill>
@@ -8212,93 +8691,9 @@
                 <a:ea typeface="Calibri" pitchFamily="34" charset="-122"/>
                 <a:cs typeface="Calibri" pitchFamily="34" charset="-120"/>
               </a:rPr>
-              <a:t>Output: NDCG, XDCG, Fidelity, Max Relevance, Holes at various k</a:t>
-            </a:r>
-            <a:endParaRPr lang="en-US" sz="1200" dirty="0"/>
-          </a:p>
-          <a:p>
-            <a:pPr marL="342900" indent="-342900">
-              <a:spcAft>
-                <a:spcPts val="600"/>
-              </a:spcAft>
-              <a:buSzPct val="100000"/>
-              <a:buChar char="•"/>
-            </a:pPr>
-            <a:r>
-              <a:rPr lang="en-US" sz="1200" dirty="0">
-                <a:solidFill>
-                  <a:srgbClr val="212121"/>
-                </a:solidFill>
-                <a:latin typeface="Calibri" pitchFamily="34" charset="0"/>
-                <a:ea typeface="Calibri" pitchFamily="34" charset="-122"/>
-                <a:cs typeface="Calibri" pitchFamily="34" charset="-120"/>
-              </a:rPr>
-              <a:t>Use it to answer:</a:t>
-            </a:r>
-            <a:endParaRPr lang="en-US" sz="1200" dirty="0"/>
-          </a:p>
-          <a:p>
-            <a:pPr lvl="1" marL="685800" indent="-342900">
-              <a:spcAft>
-                <a:spcPts val="600"/>
-              </a:spcAft>
-              <a:buSzPct val="100000"/>
-              <a:buChar char="•"/>
-            </a:pPr>
-            <a:r>
-              <a:rPr lang="en-US" sz="1200" dirty="0">
-                <a:solidFill>
-                  <a:srgbClr val="212121"/>
-                </a:solidFill>
-                <a:latin typeface="Calibri" pitchFamily="34" charset="0"/>
-                <a:ea typeface="Calibri" pitchFamily="34" charset="-122"/>
-                <a:cs typeface="Calibri" pitchFamily="34" charset="-120"/>
-              </a:rPr>
-              <a:t>Should I use vector, keyword, or hybrid?</a:t>
-            </a:r>
-            <a:endParaRPr lang="en-US" sz="1200" dirty="0"/>
-          </a:p>
-          <a:p>
-            <a:pPr lvl="1" marL="685800" indent="-342900">
-              <a:spcAft>
-                <a:spcPts val="600"/>
-              </a:spcAft>
-              <a:buSzPct val="100000"/>
-              <a:buChar char="•"/>
-            </a:pPr>
-            <a:r>
-              <a:rPr lang="en-US" sz="1200" dirty="0">
-                <a:solidFill>
-                  <a:srgbClr val="212121"/>
-                </a:solidFill>
-                <a:latin typeface="Calibri" pitchFamily="34" charset="0"/>
-                <a:ea typeface="Calibri" pitchFamily="34" charset="-122"/>
-                <a:cs typeface="Calibri" pitchFamily="34" charset="-120"/>
-              </a:rPr>
-              <a:t>What's the right top_k?</a:t>
-            </a:r>
-            <a:endParaRPr lang="en-US" sz="1200" dirty="0"/>
-          </a:p>
-          <a:p>
-            <a:pPr lvl="1" marL="685800" indent="-342900">
-              <a:spcAft>
-                <a:spcPts val="600"/>
-              </a:spcAft>
-              <a:buSzPct val="100000"/>
-              <a:buChar char="•"/>
-            </a:pPr>
-            <a:r>
-              <a:rPr lang="en-US" sz="1200" dirty="0">
-                <a:solidFill>
-                  <a:srgbClr val="212121"/>
-                </a:solidFill>
-                <a:latin typeface="Calibri" pitchFamily="34" charset="0"/>
-                <a:ea typeface="Calibri" pitchFamily="34" charset="-122"/>
-                <a:cs typeface="Calibri" pitchFamily="34" charset="-120"/>
-              </a:rPr>
-              <a:t>Is 500-token chunking better than 1000?</a:t>
-            </a:r>
-            <a:endParaRPr lang="en-US" sz="1200" dirty="0"/>
+              <a:t>Response Completeness = recall. Did the response leave anything out that the ground truth expected? (Coverage check.)</a:t>
+            </a:r>
+            <a:endParaRPr lang="en-US" sz="1500" dirty="0"/>
           </a:p>
         </p:txBody>
       </p:sp>
@@ -8310,8 +8705,8 @@
         </p:nvSpPr>
         <p:spPr>
           <a:xfrm>
-            <a:off x="365760" y="4343400"/>
-            <a:ext cx="8412480" cy="365760"/>
+            <a:off x="365760" y="3291840"/>
+            <a:ext cx="8412480" cy="1005840"/>
           </a:xfrm>
           <a:prstGeom prst="rect">
             <a:avLst/>
@@ -8327,6 +8722,45 @@
               <a:buNone/>
             </a:pPr>
             <a:r>
+              <a:rPr lang="en-US" sz="1300" dirty="0">
+                <a:solidFill>
+                  <a:srgbClr val="212121"/>
+                </a:solidFill>
+                <a:latin typeface="Calibri" pitchFamily="34" charset="0"/>
+                <a:ea typeface="Calibri" pitchFamily="34" charset="-122"/>
+                <a:cs typeface="Calibri" pitchFamily="34" charset="-120"/>
+              </a:rPr>
+              <a:t>A high-groundedness, low-completeness response is accurate but partial. A low-groundedness, high-completeness response is comprehensive but making things up. Track both.</a:t>
+            </a:r>
+            <a:endParaRPr lang="en-US" sz="1300" dirty="0"/>
+          </a:p>
+        </p:txBody>
+      </p:sp>
+      <p:sp>
+        <p:nvSpPr>
+          <p:cNvPr id="8" name="Text 6"/>
+          <p:cNvSpPr/>
+          <p:nvPr/>
+        </p:nvSpPr>
+        <p:spPr>
+          <a:xfrm>
+            <a:off x="365760" y="4389120"/>
+            <a:ext cx="8412480" cy="365760"/>
+          </a:xfrm>
+          <a:prstGeom prst="rect">
+            <a:avLst/>
+          </a:prstGeom>
+          <a:noFill/>
+          <a:ln/>
+        </p:spPr>
+        <p:txBody>
+          <a:bodyPr wrap="square" rtlCol="0" anchor="ctr"/>
+          <a:lstStyle/>
+          <a:p>
+            <a:pPr indent="0" marL="0">
+              <a:buNone/>
+            </a:pPr>
+            <a:r>
               <a:rPr lang="en-US" sz="1200" i="1" dirty="0">
                 <a:solidFill>
                   <a:srgbClr val="6B7280"/>
@@ -8335,7 +8769,7 @@
                 <a:ea typeface="Calibri" pitchFamily="34" charset="-122"/>
                 <a:cs typeface="Calibri" pitchFamily="34" charset="-120"/>
               </a:rPr>
-              <a:t>You need labeled data — a person judged which docs are relevant for each query. Worth it when tuning matters.</a:t>
+              <a:t>Response Completeness needs ground truth — invest when you have a benchmark corpus.</a:t>
             </a:r>
             <a:endParaRPr lang="en-US" sz="1200" dirty="0"/>
           </a:p>
@@ -8465,7 +8899,7 @@
                 <a:ea typeface="Calibri" pitchFamily="34" charset="-122"/>
                 <a:cs typeface="Calibri" pitchFamily="34" charset="-120"/>
               </a:rPr>
-              <a:t>Configuring an evaluator (Python SDK)</a:t>
+              <a:t>Document Retrieval — the deep debug tool</a:t>
             </a:r>
             <a:endParaRPr lang="en-US" sz="2800" dirty="0"/>
           </a:p>
@@ -8473,28 +8907,42 @@
       </p:sp>
       <p:sp>
         <p:nvSpPr>
-          <p:cNvPr id="5" name="Shape 3"/>
+          <p:cNvPr id="5" name="Text 3"/>
           <p:cNvSpPr/>
           <p:nvPr/>
         </p:nvSpPr>
         <p:spPr>
           <a:xfrm>
             <a:off x="365760" y="1097280"/>
-            <a:ext cx="8412480" cy="3291840"/>
-          </a:xfrm>
-          <a:prstGeom prst="rect">
-            <a:avLst/>
-          </a:prstGeom>
-          <a:solidFill>
-            <a:srgbClr val="F3F4F6"/>
-          </a:solidFill>
-          <a:ln w="6350">
-            <a:solidFill>
-              <a:srgbClr val="D1D5DB"/>
-            </a:solidFill>
-            <a:prstDash val="solid"/>
-          </a:ln>
-        </p:spPr>
+            <a:ext cx="8412480" cy="457200"/>
+          </a:xfrm>
+          <a:prstGeom prst="rect">
+            <a:avLst/>
+          </a:prstGeom>
+          <a:noFill/>
+          <a:ln/>
+        </p:spPr>
+        <p:txBody>
+          <a:bodyPr wrap="square" rtlCol="0" anchor="ctr"/>
+          <a:lstStyle/>
+          <a:p>
+            <a:pPr indent="0" marL="0">
+              <a:buNone/>
+            </a:pPr>
+            <a:r>
+              <a:rPr lang="en-US" sz="1400" i="1" dirty="0">
+                <a:solidFill>
+                  <a:srgbClr val="212121"/>
+                </a:solidFill>
+                <a:latin typeface="Calibri" pitchFamily="34" charset="0"/>
+                <a:ea typeface="Calibri" pitchFamily="34" charset="-122"/>
+                <a:cs typeface="Calibri" pitchFamily="34" charset="-120"/>
+              </a:rPr>
+              <a:t>When retrieval quality is the bottleneck, this is your parameter-sweep evaluator.</a:t>
+            </a:r>
+            <a:endParaRPr lang="en-US" sz="1400" dirty="0"/>
+          </a:p>
+        </p:txBody>
       </p:sp>
       <p:sp>
         <p:nvSpPr>
@@ -8504,8 +8952,8 @@
         </p:nvSpPr>
         <p:spPr>
           <a:xfrm>
-            <a:off x="502920" y="1188720"/>
-            <a:ext cx="8138160" cy="3108960"/>
+            <a:off x="365760" y="1600200"/>
+            <a:ext cx="8412480" cy="2560320"/>
           </a:xfrm>
           <a:prstGeom prst="rect">
             <a:avLst/>
@@ -8514,330 +8962,133 @@
           <a:ln/>
         </p:spPr>
         <p:txBody>
-          <a:bodyPr wrap="square" lIns="0" tIns="0" rIns="0" bIns="0" rtlCol="0" anchor="t"/>
-          <a:lstStyle/>
-          <a:p>
-            <a:pPr indent="0" marL="0">
-              <a:buNone/>
-            </a:pPr>
-            <a:r>
-              <a:rPr lang="en-US" sz="1100" dirty="0">
+          <a:bodyPr wrap="square" rtlCol="0" anchor="ctr"/>
+          <a:lstStyle/>
+          <a:p>
+            <a:pPr marL="342900" indent="-342900">
+              <a:spcAft>
+                <a:spcPts val="600"/>
+              </a:spcAft>
+              <a:buSzPct val="100000"/>
+              <a:buChar char="•"/>
+            </a:pPr>
+            <a:r>
+              <a:rPr lang="en-US" sz="1200" dirty="0">
                 <a:solidFill>
                   <a:srgbClr val="212121"/>
                 </a:solidFill>
-                <a:latin typeface="Consolas" pitchFamily="34" charset="0"/>
-                <a:ea typeface="Consolas" pitchFamily="34" charset="-122"/>
-                <a:cs typeface="Consolas" pitchFamily="34" charset="-120"/>
-              </a:rPr>
-              <a:t>testing_criteria = [</a:t>
-            </a:r>
-            <a:endParaRPr lang="en-US" sz="1100" dirty="0"/>
-          </a:p>
-          <a:p>
-            <a:pPr indent="0" marL="0">
-              <a:buNone/>
-            </a:pPr>
-            <a:r>
-              <a:rPr lang="en-US" sz="1100" dirty="0">
+                <a:latin typeface="Calibri" pitchFamily="34" charset="0"/>
+                <a:ea typeface="Calibri" pitchFamily="34" charset="-122"/>
+                <a:cs typeface="Calibri" pitchFamily="34" charset="-120"/>
+              </a:rPr>
+              <a:t>Input: query-relevance labels (qrels) and the ranked retrieval output</a:t>
+            </a:r>
+            <a:endParaRPr lang="en-US" sz="1200" dirty="0"/>
+          </a:p>
+          <a:p>
+            <a:pPr marL="342900" indent="-342900">
+              <a:spcAft>
+                <a:spcPts val="600"/>
+              </a:spcAft>
+              <a:buSzPct val="100000"/>
+              <a:buChar char="•"/>
+            </a:pPr>
+            <a:r>
+              <a:rPr lang="en-US" sz="1200" dirty="0">
                 <a:solidFill>
                   <a:srgbClr val="212121"/>
                 </a:solidFill>
-                <a:latin typeface="Consolas" pitchFamily="34" charset="0"/>
-                <a:ea typeface="Consolas" pitchFamily="34" charset="-122"/>
-                <a:cs typeface="Consolas" pitchFamily="34" charset="-120"/>
-              </a:rPr>
-              <a:t>    {</a:t>
-            </a:r>
-            <a:endParaRPr lang="en-US" sz="1100" dirty="0"/>
-          </a:p>
-          <a:p>
-            <a:pPr indent="0" marL="0">
-              <a:buNone/>
-            </a:pPr>
-            <a:r>
-              <a:rPr lang="en-US" sz="1100" dirty="0">
+                <a:latin typeface="Calibri" pitchFamily="34" charset="0"/>
+                <a:ea typeface="Calibri" pitchFamily="34" charset="-122"/>
+                <a:cs typeface="Calibri" pitchFamily="34" charset="-120"/>
+              </a:rPr>
+              <a:t>Output: NDCG, XDCG, Fidelity, Max Relevance, Holes at various k</a:t>
+            </a:r>
+            <a:endParaRPr lang="en-US" sz="1200" dirty="0"/>
+          </a:p>
+          <a:p>
+            <a:pPr marL="342900" indent="-342900">
+              <a:spcAft>
+                <a:spcPts val="600"/>
+              </a:spcAft>
+              <a:buSzPct val="100000"/>
+              <a:buChar char="•"/>
+            </a:pPr>
+            <a:r>
+              <a:rPr lang="en-US" sz="1200" dirty="0">
                 <a:solidFill>
                   <a:srgbClr val="212121"/>
                 </a:solidFill>
-                <a:latin typeface="Consolas" pitchFamily="34" charset="0"/>
-                <a:ea typeface="Consolas" pitchFamily="34" charset="-122"/>
-                <a:cs typeface="Consolas" pitchFamily="34" charset="-120"/>
-              </a:rPr>
-              <a:t>        "type": "azure_ai_evaluator",</a:t>
-            </a:r>
-            <a:endParaRPr lang="en-US" sz="1100" dirty="0"/>
-          </a:p>
-          <a:p>
-            <a:pPr indent="0" marL="0">
-              <a:buNone/>
-            </a:pPr>
-            <a:r>
-              <a:rPr lang="en-US" sz="1100" dirty="0">
+                <a:latin typeface="Calibri" pitchFamily="34" charset="0"/>
+                <a:ea typeface="Calibri" pitchFamily="34" charset="-122"/>
+                <a:cs typeface="Calibri" pitchFamily="34" charset="-120"/>
+              </a:rPr>
+              <a:t>Use it to answer:</a:t>
+            </a:r>
+            <a:endParaRPr lang="en-US" sz="1200" dirty="0"/>
+          </a:p>
+          <a:p>
+            <a:pPr lvl="1" marL="685800" indent="-342900">
+              <a:spcAft>
+                <a:spcPts val="600"/>
+              </a:spcAft>
+              <a:buSzPct val="100000"/>
+              <a:buChar char="•"/>
+            </a:pPr>
+            <a:r>
+              <a:rPr lang="en-US" sz="1200" dirty="0">
                 <a:solidFill>
                   <a:srgbClr val="212121"/>
                 </a:solidFill>
-                <a:latin typeface="Consolas" pitchFamily="34" charset="0"/>
-                <a:ea typeface="Consolas" pitchFamily="34" charset="-122"/>
-                <a:cs typeface="Consolas" pitchFamily="34" charset="-120"/>
-              </a:rPr>
-              <a:t>        "name": "groundedness",</a:t>
-            </a:r>
-            <a:endParaRPr lang="en-US" sz="1100" dirty="0"/>
-          </a:p>
-          <a:p>
-            <a:pPr indent="0" marL="0">
-              <a:buNone/>
-            </a:pPr>
-            <a:r>
-              <a:rPr lang="en-US" sz="1100" dirty="0">
+                <a:latin typeface="Calibri" pitchFamily="34" charset="0"/>
+                <a:ea typeface="Calibri" pitchFamily="34" charset="-122"/>
+                <a:cs typeface="Calibri" pitchFamily="34" charset="-120"/>
+              </a:rPr>
+              <a:t>Should I use vector, keyword, or hybrid?</a:t>
+            </a:r>
+            <a:endParaRPr lang="en-US" sz="1200" dirty="0"/>
+          </a:p>
+          <a:p>
+            <a:pPr lvl="1" marL="685800" indent="-342900">
+              <a:spcAft>
+                <a:spcPts val="600"/>
+              </a:spcAft>
+              <a:buSzPct val="100000"/>
+              <a:buChar char="•"/>
+            </a:pPr>
+            <a:r>
+              <a:rPr lang="en-US" sz="1200" dirty="0">
                 <a:solidFill>
                   <a:srgbClr val="212121"/>
                 </a:solidFill>
-                <a:latin typeface="Consolas" pitchFamily="34" charset="0"/>
-                <a:ea typeface="Consolas" pitchFamily="34" charset="-122"/>
-                <a:cs typeface="Consolas" pitchFamily="34" charset="-120"/>
-              </a:rPr>
-              <a:t>        "evaluator_name": "builtin.groundedness",</a:t>
-            </a:r>
-            <a:endParaRPr lang="en-US" sz="1100" dirty="0"/>
-          </a:p>
-          <a:p>
-            <a:pPr indent="0" marL="0">
-              <a:buNone/>
-            </a:pPr>
-            <a:r>
-              <a:rPr lang="en-US" sz="1100" dirty="0">
+                <a:latin typeface="Calibri" pitchFamily="34" charset="0"/>
+                <a:ea typeface="Calibri" pitchFamily="34" charset="-122"/>
+                <a:cs typeface="Calibri" pitchFamily="34" charset="-120"/>
+              </a:rPr>
+              <a:t>What's the right top_k?</a:t>
+            </a:r>
+            <a:endParaRPr lang="en-US" sz="1200" dirty="0"/>
+          </a:p>
+          <a:p>
+            <a:pPr lvl="1" marL="685800" indent="-342900">
+              <a:spcAft>
+                <a:spcPts val="600"/>
+              </a:spcAft>
+              <a:buSzPct val="100000"/>
+              <a:buChar char="•"/>
+            </a:pPr>
+            <a:r>
+              <a:rPr lang="en-US" sz="1200" dirty="0">
                 <a:solidFill>
                   <a:srgbClr val="212121"/>
                 </a:solidFill>
-                <a:latin typeface="Consolas" pitchFamily="34" charset="0"/>
-                <a:ea typeface="Consolas" pitchFamily="34" charset="-122"/>
-                <a:cs typeface="Consolas" pitchFamily="34" charset="-120"/>
-              </a:rPr>
-              <a:t>        "initialization_parameters": {"deployment_name": model_deployment},</a:t>
-            </a:r>
-            <a:endParaRPr lang="en-US" sz="1100" dirty="0"/>
-          </a:p>
-          <a:p>
-            <a:pPr indent="0" marL="0">
-              <a:buNone/>
-            </a:pPr>
-            <a:r>
-              <a:rPr lang="en-US" sz="1100" dirty="0">
-                <a:solidFill>
-                  <a:srgbClr val="212121"/>
-                </a:solidFill>
-                <a:latin typeface="Consolas" pitchFamily="34" charset="0"/>
-                <a:ea typeface="Consolas" pitchFamily="34" charset="-122"/>
-                <a:cs typeface="Consolas" pitchFamily="34" charset="-120"/>
-              </a:rPr>
-              <a:t>        "data_mapping": {</a:t>
-            </a:r>
-            <a:endParaRPr lang="en-US" sz="1100" dirty="0"/>
-          </a:p>
-          <a:p>
-            <a:pPr indent="0" marL="0">
-              <a:buNone/>
-            </a:pPr>
-            <a:r>
-              <a:rPr lang="en-US" sz="1100" dirty="0">
-                <a:solidFill>
-                  <a:srgbClr val="212121"/>
-                </a:solidFill>
-                <a:latin typeface="Consolas" pitchFamily="34" charset="0"/>
-                <a:ea typeface="Consolas" pitchFamily="34" charset="-122"/>
-                <a:cs typeface="Consolas" pitchFamily="34" charset="-120"/>
-              </a:rPr>
-              <a:t>            "context": "{{item.context}}",</a:t>
-            </a:r>
-            <a:endParaRPr lang="en-US" sz="1100" dirty="0"/>
-          </a:p>
-          <a:p>
-            <a:pPr indent="0" marL="0">
-              <a:buNone/>
-            </a:pPr>
-            <a:r>
-              <a:rPr lang="en-US" sz="1100" dirty="0">
-                <a:solidFill>
-                  <a:srgbClr val="212121"/>
-                </a:solidFill>
-                <a:latin typeface="Consolas" pitchFamily="34" charset="0"/>
-                <a:ea typeface="Consolas" pitchFamily="34" charset="-122"/>
-                <a:cs typeface="Consolas" pitchFamily="34" charset="-120"/>
-              </a:rPr>
-              <a:t>            "response": "{{item.response}}",</a:t>
-            </a:r>
-            <a:endParaRPr lang="en-US" sz="1100" dirty="0"/>
-          </a:p>
-          <a:p>
-            <a:pPr indent="0" marL="0">
-              <a:buNone/>
-            </a:pPr>
-            <a:r>
-              <a:rPr lang="en-US" sz="1100" dirty="0">
-                <a:solidFill>
-                  <a:srgbClr val="212121"/>
-                </a:solidFill>
-                <a:latin typeface="Consolas" pitchFamily="34" charset="0"/>
-                <a:ea typeface="Consolas" pitchFamily="34" charset="-122"/>
-                <a:cs typeface="Consolas" pitchFamily="34" charset="-120"/>
-              </a:rPr>
-              <a:t>        },</a:t>
-            </a:r>
-            <a:endParaRPr lang="en-US" sz="1100" dirty="0"/>
-          </a:p>
-          <a:p>
-            <a:pPr indent="0" marL="0">
-              <a:buNone/>
-            </a:pPr>
-            <a:r>
-              <a:rPr lang="en-US" sz="1100" dirty="0">
-                <a:solidFill>
-                  <a:srgbClr val="212121"/>
-                </a:solidFill>
-                <a:latin typeface="Consolas" pitchFamily="34" charset="0"/>
-                <a:ea typeface="Consolas" pitchFamily="34" charset="-122"/>
-                <a:cs typeface="Consolas" pitchFamily="34" charset="-120"/>
-              </a:rPr>
-              <a:t>    },</a:t>
-            </a:r>
-            <a:endParaRPr lang="en-US" sz="1100" dirty="0"/>
-          </a:p>
-          <a:p>
-            <a:pPr indent="0" marL="0">
-              <a:buNone/>
-            </a:pPr>
-            <a:r>
-              <a:rPr lang="en-US" sz="1100" dirty="0">
-                <a:solidFill>
-                  <a:srgbClr val="212121"/>
-                </a:solidFill>
-                <a:latin typeface="Consolas" pitchFamily="34" charset="0"/>
-                <a:ea typeface="Consolas" pitchFamily="34" charset="-122"/>
-                <a:cs typeface="Consolas" pitchFamily="34" charset="-120"/>
-              </a:rPr>
-              <a:t>    {</a:t>
-            </a:r>
-            <a:endParaRPr lang="en-US" sz="1100" dirty="0"/>
-          </a:p>
-          <a:p>
-            <a:pPr indent="0" marL="0">
-              <a:buNone/>
-            </a:pPr>
-            <a:r>
-              <a:rPr lang="en-US" sz="1100" dirty="0">
-                <a:solidFill>
-                  <a:srgbClr val="212121"/>
-                </a:solidFill>
-                <a:latin typeface="Consolas" pitchFamily="34" charset="0"/>
-                <a:ea typeface="Consolas" pitchFamily="34" charset="-122"/>
-                <a:cs typeface="Consolas" pitchFamily="34" charset="-120"/>
-              </a:rPr>
-              <a:t>        "type": "azure_ai_evaluator",</a:t>
-            </a:r>
-            <a:endParaRPr lang="en-US" sz="1100" dirty="0"/>
-          </a:p>
-          <a:p>
-            <a:pPr indent="0" marL="0">
-              <a:buNone/>
-            </a:pPr>
-            <a:r>
-              <a:rPr lang="en-US" sz="1100" dirty="0">
-                <a:solidFill>
-                  <a:srgbClr val="212121"/>
-                </a:solidFill>
-                <a:latin typeface="Consolas" pitchFamily="34" charset="0"/>
-                <a:ea typeface="Consolas" pitchFamily="34" charset="-122"/>
-                <a:cs typeface="Consolas" pitchFamily="34" charset="-120"/>
-              </a:rPr>
-              <a:t>        "name": "retrieval",</a:t>
-            </a:r>
-            <a:endParaRPr lang="en-US" sz="1100" dirty="0"/>
-          </a:p>
-          <a:p>
-            <a:pPr indent="0" marL="0">
-              <a:buNone/>
-            </a:pPr>
-            <a:r>
-              <a:rPr lang="en-US" sz="1100" dirty="0">
-                <a:solidFill>
-                  <a:srgbClr val="212121"/>
-                </a:solidFill>
-                <a:latin typeface="Consolas" pitchFamily="34" charset="0"/>
-                <a:ea typeface="Consolas" pitchFamily="34" charset="-122"/>
-                <a:cs typeface="Consolas" pitchFamily="34" charset="-120"/>
-              </a:rPr>
-              <a:t>        "evaluator_name": "builtin.retrieval",</a:t>
-            </a:r>
-            <a:endParaRPr lang="en-US" sz="1100" dirty="0"/>
-          </a:p>
-          <a:p>
-            <a:pPr indent="0" marL="0">
-              <a:buNone/>
-            </a:pPr>
-            <a:r>
-              <a:rPr lang="en-US" sz="1100" dirty="0">
-                <a:solidFill>
-                  <a:srgbClr val="212121"/>
-                </a:solidFill>
-                <a:latin typeface="Consolas" pitchFamily="34" charset="0"/>
-                <a:ea typeface="Consolas" pitchFamily="34" charset="-122"/>
-                <a:cs typeface="Consolas" pitchFamily="34" charset="-120"/>
-              </a:rPr>
-              <a:t>        "initialization_parameters": {"deployment_name": model_deployment},</a:t>
-            </a:r>
-            <a:endParaRPr lang="en-US" sz="1100" dirty="0"/>
-          </a:p>
-          <a:p>
-            <a:pPr indent="0" marL="0">
-              <a:buNone/>
-            </a:pPr>
-            <a:r>
-              <a:rPr lang="en-US" sz="1100" dirty="0">
-                <a:solidFill>
-                  <a:srgbClr val="212121"/>
-                </a:solidFill>
-                <a:latin typeface="Consolas" pitchFamily="34" charset="0"/>
-                <a:ea typeface="Consolas" pitchFamily="34" charset="-122"/>
-                <a:cs typeface="Consolas" pitchFamily="34" charset="-120"/>
-              </a:rPr>
-              <a:t>        "data_mapping": {"query": "{{item.query}}", "context": "{{item.context}}"},</a:t>
-            </a:r>
-            <a:endParaRPr lang="en-US" sz="1100" dirty="0"/>
-          </a:p>
-          <a:p>
-            <a:pPr indent="0" marL="0">
-              <a:buNone/>
-            </a:pPr>
-            <a:r>
-              <a:rPr lang="en-US" sz="1100" dirty="0">
-                <a:solidFill>
-                  <a:srgbClr val="212121"/>
-                </a:solidFill>
-                <a:latin typeface="Consolas" pitchFamily="34" charset="0"/>
-                <a:ea typeface="Consolas" pitchFamily="34" charset="-122"/>
-                <a:cs typeface="Consolas" pitchFamily="34" charset="-120"/>
-              </a:rPr>
-              <a:t>    },</a:t>
-            </a:r>
-            <a:endParaRPr lang="en-US" sz="1100" dirty="0"/>
-          </a:p>
-          <a:p>
-            <a:pPr indent="0" marL="0">
-              <a:buNone/>
-            </a:pPr>
-            <a:r>
-              <a:rPr lang="en-US" sz="1100" dirty="0">
-                <a:solidFill>
-                  <a:srgbClr val="212121"/>
-                </a:solidFill>
-                <a:latin typeface="Consolas" pitchFamily="34" charset="0"/>
-                <a:ea typeface="Consolas" pitchFamily="34" charset="-122"/>
-                <a:cs typeface="Consolas" pitchFamily="34" charset="-120"/>
-              </a:rPr>
-              <a:t>]</a:t>
-            </a:r>
-            <a:endParaRPr lang="en-US" sz="1100" dirty="0"/>
+                <a:latin typeface="Calibri" pitchFamily="34" charset="0"/>
+                <a:ea typeface="Calibri" pitchFamily="34" charset="-122"/>
+                <a:cs typeface="Calibri" pitchFamily="34" charset="-120"/>
+              </a:rPr>
+              <a:t>Is 500-token chunking better than 1000?</a:t>
+            </a:r>
+            <a:endParaRPr lang="en-US" sz="1200" dirty="0"/>
           </a:p>
         </p:txBody>
       </p:sp>
@@ -8849,7 +9100,7 @@
         </p:nvSpPr>
         <p:spPr>
           <a:xfrm>
-            <a:off x="365760" y="4480560"/>
+            <a:off x="365760" y="4343400"/>
             <a:ext cx="8412480" cy="365760"/>
           </a:xfrm>
           <a:prstGeom prst="rect">
@@ -8874,7 +9125,7 @@
                 <a:ea typeface="Calibri" pitchFamily="34" charset="-122"/>
                 <a:cs typeface="Calibri" pitchFamily="34" charset="-120"/>
               </a:rPr>
-              <a:t>Same JSON shape for each evaluator. The data_mapping tells the evaluator where to find fields on your test dataset.</a:t>
+              <a:t>You need labeled data — a person judged which docs are relevant for each query. Worth it when tuning matters.</a:t>
             </a:r>
             <a:endParaRPr lang="en-US" sz="1200" dirty="0"/>
           </a:p>
@@ -9004,7 +9255,7 @@
                 <a:ea typeface="Calibri" pitchFamily="34" charset="-122"/>
                 <a:cs typeface="Calibri" pitchFamily="34" charset="-120"/>
               </a:rPr>
-              <a:t>The test dataset — smaller than you think</a:t>
+              <a:t>Configuring an evaluator (Python SDK)</a:t>
             </a:r>
             <a:endParaRPr lang="en-US" sz="2800" dirty="0"/>
           </a:p>
@@ -9012,53 +9263,14 @@
       </p:sp>
       <p:sp>
         <p:nvSpPr>
-          <p:cNvPr id="5" name="Text 3"/>
+          <p:cNvPr id="5" name="Shape 3"/>
           <p:cNvSpPr/>
           <p:nvPr/>
         </p:nvSpPr>
         <p:spPr>
           <a:xfrm>
-            <a:off x="365760" y="1051560"/>
-            <a:ext cx="8412480" cy="365760"/>
-          </a:xfrm>
-          <a:prstGeom prst="rect">
-            <a:avLst/>
-          </a:prstGeom>
-          <a:noFill/>
-          <a:ln/>
-        </p:spPr>
-        <p:txBody>
-          <a:bodyPr wrap="square" rtlCol="0" anchor="ctr"/>
-          <a:lstStyle/>
-          <a:p>
-            <a:pPr indent="0" marL="0">
-              <a:buNone/>
-            </a:pPr>
-            <a:r>
-              <a:rPr lang="en-US" sz="1400" dirty="0">
-                <a:solidFill>
-                  <a:srgbClr val="212121"/>
-                </a:solidFill>
-                <a:latin typeface="Calibri" pitchFamily="34" charset="0"/>
-                <a:ea typeface="Calibri" pitchFamily="34" charset="-122"/>
-                <a:cs typeface="Calibri" pitchFamily="34" charset="-120"/>
-              </a:rPr>
-              <a:t>A JSONL file, one line per test case:</a:t>
-            </a:r>
-            <a:endParaRPr lang="en-US" sz="1400" dirty="0"/>
-          </a:p>
-        </p:txBody>
-      </p:sp>
-      <p:sp>
-        <p:nvSpPr>
-          <p:cNvPr id="6" name="Shape 4"/>
-          <p:cNvSpPr/>
-          <p:nvPr/>
-        </p:nvSpPr>
-        <p:spPr>
-          <a:xfrm>
-            <a:off x="365760" y="1508760"/>
-            <a:ext cx="8412480" cy="2194560"/>
+            <a:off x="365760" y="1097280"/>
+            <a:ext cx="8412480" cy="3291840"/>
           </a:xfrm>
           <a:prstGeom prst="rect">
             <a:avLst/>
@@ -9076,14 +9288,359 @@
       </p:sp>
       <p:sp>
         <p:nvSpPr>
+          <p:cNvPr id="6" name="Text 4"/>
+          <p:cNvSpPr/>
+          <p:nvPr/>
+        </p:nvSpPr>
+        <p:spPr>
+          <a:xfrm>
+            <a:off x="502920" y="1188720"/>
+            <a:ext cx="8138160" cy="3108960"/>
+          </a:xfrm>
+          <a:prstGeom prst="rect">
+            <a:avLst/>
+          </a:prstGeom>
+          <a:noFill/>
+          <a:ln/>
+        </p:spPr>
+        <p:txBody>
+          <a:bodyPr wrap="square" lIns="0" tIns="0" rIns="0" bIns="0" rtlCol="0" anchor="t"/>
+          <a:lstStyle/>
+          <a:p>
+            <a:pPr indent="0" marL="0">
+              <a:buNone/>
+            </a:pPr>
+            <a:r>
+              <a:rPr lang="en-US" sz="1100" dirty="0">
+                <a:solidFill>
+                  <a:srgbClr val="212121"/>
+                </a:solidFill>
+                <a:latin typeface="Consolas" pitchFamily="34" charset="0"/>
+                <a:ea typeface="Consolas" pitchFamily="34" charset="-122"/>
+                <a:cs typeface="Consolas" pitchFamily="34" charset="-120"/>
+              </a:rPr>
+              <a:t>testing_criteria = [</a:t>
+            </a:r>
+            <a:endParaRPr lang="en-US" sz="1100" dirty="0"/>
+          </a:p>
+          <a:p>
+            <a:pPr indent="0" marL="0">
+              <a:buNone/>
+            </a:pPr>
+            <a:r>
+              <a:rPr lang="en-US" sz="1100" dirty="0">
+                <a:solidFill>
+                  <a:srgbClr val="212121"/>
+                </a:solidFill>
+                <a:latin typeface="Consolas" pitchFamily="34" charset="0"/>
+                <a:ea typeface="Consolas" pitchFamily="34" charset="-122"/>
+                <a:cs typeface="Consolas" pitchFamily="34" charset="-120"/>
+              </a:rPr>
+              <a:t>    {</a:t>
+            </a:r>
+            <a:endParaRPr lang="en-US" sz="1100" dirty="0"/>
+          </a:p>
+          <a:p>
+            <a:pPr indent="0" marL="0">
+              <a:buNone/>
+            </a:pPr>
+            <a:r>
+              <a:rPr lang="en-US" sz="1100" dirty="0">
+                <a:solidFill>
+                  <a:srgbClr val="212121"/>
+                </a:solidFill>
+                <a:latin typeface="Consolas" pitchFamily="34" charset="0"/>
+                <a:ea typeface="Consolas" pitchFamily="34" charset="-122"/>
+                <a:cs typeface="Consolas" pitchFamily="34" charset="-120"/>
+              </a:rPr>
+              <a:t>        "type": "azure_ai_evaluator",</a:t>
+            </a:r>
+            <a:endParaRPr lang="en-US" sz="1100" dirty="0"/>
+          </a:p>
+          <a:p>
+            <a:pPr indent="0" marL="0">
+              <a:buNone/>
+            </a:pPr>
+            <a:r>
+              <a:rPr lang="en-US" sz="1100" dirty="0">
+                <a:solidFill>
+                  <a:srgbClr val="212121"/>
+                </a:solidFill>
+                <a:latin typeface="Consolas" pitchFamily="34" charset="0"/>
+                <a:ea typeface="Consolas" pitchFamily="34" charset="-122"/>
+                <a:cs typeface="Consolas" pitchFamily="34" charset="-120"/>
+              </a:rPr>
+              <a:t>        "name": "groundedness",</a:t>
+            </a:r>
+            <a:endParaRPr lang="en-US" sz="1100" dirty="0"/>
+          </a:p>
+          <a:p>
+            <a:pPr indent="0" marL="0">
+              <a:buNone/>
+            </a:pPr>
+            <a:r>
+              <a:rPr lang="en-US" sz="1100" dirty="0">
+                <a:solidFill>
+                  <a:srgbClr val="212121"/>
+                </a:solidFill>
+                <a:latin typeface="Consolas" pitchFamily="34" charset="0"/>
+                <a:ea typeface="Consolas" pitchFamily="34" charset="-122"/>
+                <a:cs typeface="Consolas" pitchFamily="34" charset="-120"/>
+              </a:rPr>
+              <a:t>        "evaluator_name": "builtin.groundedness",</a:t>
+            </a:r>
+            <a:endParaRPr lang="en-US" sz="1100" dirty="0"/>
+          </a:p>
+          <a:p>
+            <a:pPr indent="0" marL="0">
+              <a:buNone/>
+            </a:pPr>
+            <a:r>
+              <a:rPr lang="en-US" sz="1100" dirty="0">
+                <a:solidFill>
+                  <a:srgbClr val="212121"/>
+                </a:solidFill>
+                <a:latin typeface="Consolas" pitchFamily="34" charset="0"/>
+                <a:ea typeface="Consolas" pitchFamily="34" charset="-122"/>
+                <a:cs typeface="Consolas" pitchFamily="34" charset="-120"/>
+              </a:rPr>
+              <a:t>        "initialization_parameters": {"deployment_name": model_deployment},</a:t>
+            </a:r>
+            <a:endParaRPr lang="en-US" sz="1100" dirty="0"/>
+          </a:p>
+          <a:p>
+            <a:pPr indent="0" marL="0">
+              <a:buNone/>
+            </a:pPr>
+            <a:r>
+              <a:rPr lang="en-US" sz="1100" dirty="0">
+                <a:solidFill>
+                  <a:srgbClr val="212121"/>
+                </a:solidFill>
+                <a:latin typeface="Consolas" pitchFamily="34" charset="0"/>
+                <a:ea typeface="Consolas" pitchFamily="34" charset="-122"/>
+                <a:cs typeface="Consolas" pitchFamily="34" charset="-120"/>
+              </a:rPr>
+              <a:t>        "data_mapping": {</a:t>
+            </a:r>
+            <a:endParaRPr lang="en-US" sz="1100" dirty="0"/>
+          </a:p>
+          <a:p>
+            <a:pPr indent="0" marL="0">
+              <a:buNone/>
+            </a:pPr>
+            <a:r>
+              <a:rPr lang="en-US" sz="1100" dirty="0">
+                <a:solidFill>
+                  <a:srgbClr val="212121"/>
+                </a:solidFill>
+                <a:latin typeface="Consolas" pitchFamily="34" charset="0"/>
+                <a:ea typeface="Consolas" pitchFamily="34" charset="-122"/>
+                <a:cs typeface="Consolas" pitchFamily="34" charset="-120"/>
+              </a:rPr>
+              <a:t>            "context": "{{item.context}}",</a:t>
+            </a:r>
+            <a:endParaRPr lang="en-US" sz="1100" dirty="0"/>
+          </a:p>
+          <a:p>
+            <a:pPr indent="0" marL="0">
+              <a:buNone/>
+            </a:pPr>
+            <a:r>
+              <a:rPr lang="en-US" sz="1100" dirty="0">
+                <a:solidFill>
+                  <a:srgbClr val="212121"/>
+                </a:solidFill>
+                <a:latin typeface="Consolas" pitchFamily="34" charset="0"/>
+                <a:ea typeface="Consolas" pitchFamily="34" charset="-122"/>
+                <a:cs typeface="Consolas" pitchFamily="34" charset="-120"/>
+              </a:rPr>
+              <a:t>            "response": "{{item.response}}",</a:t>
+            </a:r>
+            <a:endParaRPr lang="en-US" sz="1100" dirty="0"/>
+          </a:p>
+          <a:p>
+            <a:pPr indent="0" marL="0">
+              <a:buNone/>
+            </a:pPr>
+            <a:r>
+              <a:rPr lang="en-US" sz="1100" dirty="0">
+                <a:solidFill>
+                  <a:srgbClr val="212121"/>
+                </a:solidFill>
+                <a:latin typeface="Consolas" pitchFamily="34" charset="0"/>
+                <a:ea typeface="Consolas" pitchFamily="34" charset="-122"/>
+                <a:cs typeface="Consolas" pitchFamily="34" charset="-120"/>
+              </a:rPr>
+              <a:t>        },</a:t>
+            </a:r>
+            <a:endParaRPr lang="en-US" sz="1100" dirty="0"/>
+          </a:p>
+          <a:p>
+            <a:pPr indent="0" marL="0">
+              <a:buNone/>
+            </a:pPr>
+            <a:r>
+              <a:rPr lang="en-US" sz="1100" dirty="0">
+                <a:solidFill>
+                  <a:srgbClr val="212121"/>
+                </a:solidFill>
+                <a:latin typeface="Consolas" pitchFamily="34" charset="0"/>
+                <a:ea typeface="Consolas" pitchFamily="34" charset="-122"/>
+                <a:cs typeface="Consolas" pitchFamily="34" charset="-120"/>
+              </a:rPr>
+              <a:t>    },</a:t>
+            </a:r>
+            <a:endParaRPr lang="en-US" sz="1100" dirty="0"/>
+          </a:p>
+          <a:p>
+            <a:pPr indent="0" marL="0">
+              <a:buNone/>
+            </a:pPr>
+            <a:r>
+              <a:rPr lang="en-US" sz="1100" dirty="0">
+                <a:solidFill>
+                  <a:srgbClr val="212121"/>
+                </a:solidFill>
+                <a:latin typeface="Consolas" pitchFamily="34" charset="0"/>
+                <a:ea typeface="Consolas" pitchFamily="34" charset="-122"/>
+                <a:cs typeface="Consolas" pitchFamily="34" charset="-120"/>
+              </a:rPr>
+              <a:t>    {</a:t>
+            </a:r>
+            <a:endParaRPr lang="en-US" sz="1100" dirty="0"/>
+          </a:p>
+          <a:p>
+            <a:pPr indent="0" marL="0">
+              <a:buNone/>
+            </a:pPr>
+            <a:r>
+              <a:rPr lang="en-US" sz="1100" dirty="0">
+                <a:solidFill>
+                  <a:srgbClr val="212121"/>
+                </a:solidFill>
+                <a:latin typeface="Consolas" pitchFamily="34" charset="0"/>
+                <a:ea typeface="Consolas" pitchFamily="34" charset="-122"/>
+                <a:cs typeface="Consolas" pitchFamily="34" charset="-120"/>
+              </a:rPr>
+              <a:t>        "type": "azure_ai_evaluator",</a:t>
+            </a:r>
+            <a:endParaRPr lang="en-US" sz="1100" dirty="0"/>
+          </a:p>
+          <a:p>
+            <a:pPr indent="0" marL="0">
+              <a:buNone/>
+            </a:pPr>
+            <a:r>
+              <a:rPr lang="en-US" sz="1100" dirty="0">
+                <a:solidFill>
+                  <a:srgbClr val="212121"/>
+                </a:solidFill>
+                <a:latin typeface="Consolas" pitchFamily="34" charset="0"/>
+                <a:ea typeface="Consolas" pitchFamily="34" charset="-122"/>
+                <a:cs typeface="Consolas" pitchFamily="34" charset="-120"/>
+              </a:rPr>
+              <a:t>        "name": "retrieval",</a:t>
+            </a:r>
+            <a:endParaRPr lang="en-US" sz="1100" dirty="0"/>
+          </a:p>
+          <a:p>
+            <a:pPr indent="0" marL="0">
+              <a:buNone/>
+            </a:pPr>
+            <a:r>
+              <a:rPr lang="en-US" sz="1100" dirty="0">
+                <a:solidFill>
+                  <a:srgbClr val="212121"/>
+                </a:solidFill>
+                <a:latin typeface="Consolas" pitchFamily="34" charset="0"/>
+                <a:ea typeface="Consolas" pitchFamily="34" charset="-122"/>
+                <a:cs typeface="Consolas" pitchFamily="34" charset="-120"/>
+              </a:rPr>
+              <a:t>        "evaluator_name": "builtin.retrieval",</a:t>
+            </a:r>
+            <a:endParaRPr lang="en-US" sz="1100" dirty="0"/>
+          </a:p>
+          <a:p>
+            <a:pPr indent="0" marL="0">
+              <a:buNone/>
+            </a:pPr>
+            <a:r>
+              <a:rPr lang="en-US" sz="1100" dirty="0">
+                <a:solidFill>
+                  <a:srgbClr val="212121"/>
+                </a:solidFill>
+                <a:latin typeface="Consolas" pitchFamily="34" charset="0"/>
+                <a:ea typeface="Consolas" pitchFamily="34" charset="-122"/>
+                <a:cs typeface="Consolas" pitchFamily="34" charset="-120"/>
+              </a:rPr>
+              <a:t>        "initialization_parameters": {"deployment_name": model_deployment},</a:t>
+            </a:r>
+            <a:endParaRPr lang="en-US" sz="1100" dirty="0"/>
+          </a:p>
+          <a:p>
+            <a:pPr indent="0" marL="0">
+              <a:buNone/>
+            </a:pPr>
+            <a:r>
+              <a:rPr lang="en-US" sz="1100" dirty="0">
+                <a:solidFill>
+                  <a:srgbClr val="212121"/>
+                </a:solidFill>
+                <a:latin typeface="Consolas" pitchFamily="34" charset="0"/>
+                <a:ea typeface="Consolas" pitchFamily="34" charset="-122"/>
+                <a:cs typeface="Consolas" pitchFamily="34" charset="-120"/>
+              </a:rPr>
+              <a:t>        "data_mapping": {"query": "{{item.query}}", "context": "{{item.context}}"},</a:t>
+            </a:r>
+            <a:endParaRPr lang="en-US" sz="1100" dirty="0"/>
+          </a:p>
+          <a:p>
+            <a:pPr indent="0" marL="0">
+              <a:buNone/>
+            </a:pPr>
+            <a:r>
+              <a:rPr lang="en-US" sz="1100" dirty="0">
+                <a:solidFill>
+                  <a:srgbClr val="212121"/>
+                </a:solidFill>
+                <a:latin typeface="Consolas" pitchFamily="34" charset="0"/>
+                <a:ea typeface="Consolas" pitchFamily="34" charset="-122"/>
+                <a:cs typeface="Consolas" pitchFamily="34" charset="-120"/>
+              </a:rPr>
+              <a:t>    },</a:t>
+            </a:r>
+            <a:endParaRPr lang="en-US" sz="1100" dirty="0"/>
+          </a:p>
+          <a:p>
+            <a:pPr indent="0" marL="0">
+              <a:buNone/>
+            </a:pPr>
+            <a:r>
+              <a:rPr lang="en-US" sz="1100" dirty="0">
+                <a:solidFill>
+                  <a:srgbClr val="212121"/>
+                </a:solidFill>
+                <a:latin typeface="Consolas" pitchFamily="34" charset="0"/>
+                <a:ea typeface="Consolas" pitchFamily="34" charset="-122"/>
+                <a:cs typeface="Consolas" pitchFamily="34" charset="-120"/>
+              </a:rPr>
+              <a:t>]</a:t>
+            </a:r>
+            <a:endParaRPr lang="en-US" sz="1100" dirty="0"/>
+          </a:p>
+        </p:txBody>
+      </p:sp>
+      <p:sp>
+        <p:nvSpPr>
           <p:cNvPr id="7" name="Text 5"/>
           <p:cNvSpPr/>
           <p:nvPr/>
         </p:nvSpPr>
         <p:spPr>
           <a:xfrm>
-            <a:off x="502920" y="1600200"/>
-            <a:ext cx="8138160" cy="2011680"/>
+            <a:off x="365760" y="4480560"/>
+            <a:ext cx="8412480" cy="365760"/>
           </a:xfrm>
           <a:prstGeom prst="rect">
             <a:avLst/>
@@ -9092,192 +9649,22 @@
           <a:ln/>
         </p:spPr>
         <p:txBody>
-          <a:bodyPr wrap="square" lIns="0" tIns="0" rIns="0" bIns="0" rtlCol="0" anchor="t"/>
+          <a:bodyPr wrap="square" rtlCol="0" anchor="ctr"/>
           <a:lstStyle/>
           <a:p>
             <a:pPr indent="0" marL="0">
               <a:buNone/>
             </a:pPr>
             <a:r>
-              <a:rPr lang="en-US" sz="1100" dirty="0">
-                <a:solidFill>
-                  <a:srgbClr val="212121"/>
-                </a:solidFill>
-                <a:latin typeface="Consolas" pitchFamily="34" charset="0"/>
-                <a:ea typeface="Consolas" pitchFamily="34" charset="-122"/>
-                <a:cs typeface="Consolas" pitchFamily="34" charset="-120"/>
-              </a:rPr>
-              <a:t>{"query": "How do I set up a Prompt agent?",</a:t>
-            </a:r>
-            <a:endParaRPr lang="en-US" sz="1100" dirty="0"/>
-          </a:p>
-          <a:p>
-            <a:pPr indent="0" marL="0">
-              <a:buNone/>
-            </a:pPr>
-            <a:r>
-              <a:rPr lang="en-US" sz="1100" dirty="0">
-                <a:solidFill>
-                  <a:srgbClr val="212121"/>
-                </a:solidFill>
-                <a:latin typeface="Consolas" pitchFamily="34" charset="0"/>
-                <a:ea typeface="Consolas" pitchFamily="34" charset="-122"/>
-                <a:cs typeface="Consolas" pitchFamily="34" charset="-120"/>
-              </a:rPr>
-              <a:t> "context": "A Prompt agent is authored in the Foundry portal or SDK...",</a:t>
-            </a:r>
-            <a:endParaRPr lang="en-US" sz="1100" dirty="0"/>
-          </a:p>
-          <a:p>
-            <a:pPr indent="0" marL="0">
-              <a:buNone/>
-            </a:pPr>
-            <a:r>
-              <a:rPr lang="en-US" sz="1100" dirty="0">
-                <a:solidFill>
-                  <a:srgbClr val="212121"/>
-                </a:solidFill>
-                <a:latin typeface="Consolas" pitchFamily="34" charset="0"/>
-                <a:ea typeface="Consolas" pitchFamily="34" charset="-122"/>
-                <a:cs typeface="Consolas" pitchFamily="34" charset="-120"/>
-              </a:rPr>
-              <a:t> "response": "You create a Prompt agent by..."}</a:t>
-            </a:r>
-            <a:endParaRPr lang="en-US" sz="1100" dirty="0"/>
-          </a:p>
-          <a:p>
-            <a:pPr indent="0" marL="0">
-              <a:buNone/>
-            </a:pPr>
-            <a:r>
-              <a:rPr lang="en-US" sz="1100" dirty="0">
-                <a:solidFill>
-                  <a:srgbClr val="212121"/>
-                </a:solidFill>
-                <a:latin typeface="Consolas" pitchFamily="34" charset="0"/>
-                <a:ea typeface="Consolas" pitchFamily="34" charset="-122"/>
-                <a:cs typeface="Consolas" pitchFamily="34" charset="-120"/>
-              </a:rPr>
-              <a:t>{"query": "What models does Foundry support?",</a:t>
-            </a:r>
-            <a:endParaRPr lang="en-US" sz="1100" dirty="0"/>
-          </a:p>
-          <a:p>
-            <a:pPr indent="0" marL="0">
-              <a:buNone/>
-            </a:pPr>
-            <a:r>
-              <a:rPr lang="en-US" sz="1100" dirty="0">
-                <a:solidFill>
-                  <a:srgbClr val="212121"/>
-                </a:solidFill>
-                <a:latin typeface="Consolas" pitchFamily="34" charset="0"/>
-                <a:ea typeface="Consolas" pitchFamily="34" charset="-122"/>
-                <a:cs typeface="Consolas" pitchFamily="34" charset="-120"/>
-              </a:rPr>
-              <a:t> "context": "Foundry hosts models from Azure OpenAI, Anthropic, Meta...",</a:t>
-            </a:r>
-            <a:endParaRPr lang="en-US" sz="1100" dirty="0"/>
-          </a:p>
-          <a:p>
-            <a:pPr indent="0" marL="0">
-              <a:buNone/>
-            </a:pPr>
-            <a:r>
-              <a:rPr lang="en-US" sz="1100" dirty="0">
-                <a:solidFill>
-                  <a:srgbClr val="212121"/>
-                </a:solidFill>
-                <a:latin typeface="Consolas" pitchFamily="34" charset="0"/>
-                <a:ea typeface="Consolas" pitchFamily="34" charset="-122"/>
-                <a:cs typeface="Consolas" pitchFamily="34" charset="-120"/>
-              </a:rPr>
-              <a:t> "response": "Foundry supports multiple models including..."}</a:t>
-            </a:r>
-            <a:endParaRPr lang="en-US" sz="1100" dirty="0"/>
-          </a:p>
-        </p:txBody>
-      </p:sp>
-      <p:sp>
-        <p:nvSpPr>
-          <p:cNvPr id="8" name="Text 6"/>
-          <p:cNvSpPr/>
-          <p:nvPr/>
-        </p:nvSpPr>
-        <p:spPr>
-          <a:xfrm>
-            <a:off x="365760" y="3794760"/>
-            <a:ext cx="8412480" cy="914400"/>
-          </a:xfrm>
-          <a:prstGeom prst="rect">
-            <a:avLst/>
-          </a:prstGeom>
-          <a:noFill/>
-          <a:ln/>
-        </p:spPr>
-        <p:txBody>
-          <a:bodyPr wrap="square" rtlCol="0" anchor="ctr"/>
-          <a:lstStyle/>
-          <a:p>
-            <a:pPr marL="342900" indent="-342900">
-              <a:spcAft>
-                <a:spcPts val="600"/>
-              </a:spcAft>
-              <a:buSzPct val="100000"/>
-              <a:buChar char="•"/>
-            </a:pPr>
-            <a:r>
-              <a:rPr lang="en-US" sz="1200" dirty="0">
-                <a:solidFill>
-                  <a:srgbClr val="212121"/>
-                </a:solidFill>
-                <a:latin typeface="Calibri" pitchFamily="34" charset="0"/>
-                <a:ea typeface="Calibri" pitchFamily="34" charset="-122"/>
-                <a:cs typeface="Calibri" pitchFamily="34" charset="-120"/>
-              </a:rPr>
-              <a:t>Start with 10–15 examples</a:t>
-            </a:r>
-            <a:endParaRPr lang="en-US" sz="1200" dirty="0"/>
-          </a:p>
-          <a:p>
-            <a:pPr marL="342900" indent="-342900">
-              <a:spcAft>
-                <a:spcPts val="600"/>
-              </a:spcAft>
-              <a:buSzPct val="100000"/>
-              <a:buChar char="•"/>
-            </a:pPr>
-            <a:r>
-              <a:rPr lang="en-US" sz="1200" dirty="0">
-                <a:solidFill>
-                  <a:srgbClr val="212121"/>
-                </a:solidFill>
-                <a:latin typeface="Calibri" pitchFamily="34" charset="0"/>
-                <a:ea typeface="Calibri" pitchFamily="34" charset="-122"/>
-                <a:cs typeface="Calibri" pitchFamily="34" charset="-120"/>
-              </a:rPr>
-              <a:t>Enough signal to catch obvious regressions; small enough to actually maintain</a:t>
-            </a:r>
-            <a:endParaRPr lang="en-US" sz="1200" dirty="0"/>
-          </a:p>
-          <a:p>
-            <a:pPr marL="342900" indent="-342900">
-              <a:spcAft>
-                <a:spcPts val="600"/>
-              </a:spcAft>
-              <a:buSzPct val="100000"/>
-              <a:buChar char="•"/>
-            </a:pPr>
-            <a:r>
-              <a:rPr lang="en-US" sz="1200" dirty="0">
-                <a:solidFill>
-                  <a:srgbClr val="212121"/>
-                </a:solidFill>
-                <a:latin typeface="Calibri" pitchFamily="34" charset="0"/>
-                <a:ea typeface="Calibri" pitchFamily="34" charset="-122"/>
-                <a:cs typeface="Calibri" pitchFamily="34" charset="-120"/>
-              </a:rPr>
-              <a:t>Add examples over time as you find failure modes</a:t>
+              <a:rPr lang="en-US" sz="1200" i="1" dirty="0">
+                <a:solidFill>
+                  <a:srgbClr val="6B7280"/>
+                </a:solidFill>
+                <a:latin typeface="Calibri" pitchFamily="34" charset="0"/>
+                <a:ea typeface="Calibri" pitchFamily="34" charset="-122"/>
+                <a:cs typeface="Calibri" pitchFamily="34" charset="-120"/>
+              </a:rPr>
+              <a:t>Same JSON shape for each evaluator. The data_mapping tells the evaluator where to find fields on your test dataset.</a:t>
             </a:r>
             <a:endParaRPr lang="en-US" sz="1200" dirty="0"/>
           </a:p>

--- a/decks/day2/module-3-eval-retrieval.pptx
+++ b/decks/day2/module-3-eval-retrieval.pptx
@@ -1814,7 +1814,7 @@
 • Attendees will use it when they're serious about retrieval quality
 • Requires labeled data — someone graded 'this doc is a 4/5 for this query'
 • NDCG is the classic search-quality metric
-• Parameter sweep = run with vector/keyword/hybrid, top_k=5/10/20, chunk 500/1000, compare NDCG
+• Parameter sweep = run with vector/semantic/hybrid, top_k=5/10/20, chunk 500/1000, compare NDCG
 • Introduce the concept, don't require it in the lab</a:t>
             </a:r>
             <a:endParaRPr lang="en-US" dirty="0"/>
@@ -7624,7 +7624,7 @@
                           <a:ea typeface="Calibri" pitchFamily="34" charset="-122"/>
                           <a:cs typeface="Calibri" pitchFamily="34" charset="-120"/>
                         </a:rPr>
-                        <a:t>Yes — needs query-relevance labels (qrels)</a:t>
+                        <a:t>Yes — computes metrics from qrels labels (no LLM judge)</a:t>
                       </a:r>
                       <a:endParaRPr lang="en-US" sz="1100" dirty="0">
                         <a:latin typeface="Calibri" charset="0"/>
@@ -8003,7 +8003,7 @@
                 <a:ea typeface="Calibri" pitchFamily="34" charset="-122"/>
                 <a:cs typeface="Calibri" pitchFamily="34" charset="-120"/>
               </a:rPr>
-              <a:t>Input: query, retrieved context</a:t>
+              <a:t>Input: query, context (query optional; both improve scoring)</a:t>
             </a:r>
             <a:endParaRPr lang="en-US" sz="1500" dirty="0"/>
           </a:p>
@@ -8088,7 +8088,7 @@
                 <a:ea typeface="Calibri" pitchFamily="34" charset="-122"/>
                 <a:cs typeface="Calibri" pitchFamily="34" charset="-120"/>
               </a:rPr>
-              <a:t>Input: query, response, retrieved context</a:t>
+              <a:t>Input: response required; context recommended; query optional</a:t>
             </a:r>
             <a:endParaRPr lang="en-US" sz="1500" dirty="0"/>
           </a:p>
@@ -9044,7 +9044,7 @@
                 <a:ea typeface="Calibri" pitchFamily="34" charset="-122"/>
                 <a:cs typeface="Calibri" pitchFamily="34" charset="-120"/>
               </a:rPr>
-              <a:t>Should I use vector, keyword, or hybrid?</a:t>
+              <a:t>Should I use vector, semantic, or hybrid?</a:t>
             </a:r>
             <a:endParaRPr lang="en-US" sz="1200" dirty="0"/>
           </a:p>
